--- a/Code Explaination PPT.pptx
+++ b/Code Explaination PPT.pptx
@@ -5,7 +5,7 @@
     <p:sldMasterId id="2147483648" r:id="rId1"/>
   </p:sldMasterIdLst>
   <p:notesMasterIdLst>
-    <p:notesMasterId r:id="rId24"/>
+    <p:notesMasterId r:id="rId28"/>
   </p:notesMasterIdLst>
   <p:sldIdLst>
     <p:sldId id="257" r:id="rId2"/>
@@ -22,14 +22,18 @@
     <p:sldId id="275" r:id="rId13"/>
     <p:sldId id="276" r:id="rId14"/>
     <p:sldId id="277" r:id="rId15"/>
-    <p:sldId id="285" r:id="rId16"/>
-    <p:sldId id="282" r:id="rId17"/>
-    <p:sldId id="286" r:id="rId18"/>
-    <p:sldId id="283" r:id="rId19"/>
-    <p:sldId id="284" r:id="rId20"/>
-    <p:sldId id="278" r:id="rId21"/>
-    <p:sldId id="279" r:id="rId22"/>
-    <p:sldId id="281" r:id="rId23"/>
+    <p:sldId id="278" r:id="rId16"/>
+    <p:sldId id="285" r:id="rId17"/>
+    <p:sldId id="290" r:id="rId18"/>
+    <p:sldId id="282" r:id="rId19"/>
+    <p:sldId id="286" r:id="rId20"/>
+    <p:sldId id="287" r:id="rId21"/>
+    <p:sldId id="283" r:id="rId22"/>
+    <p:sldId id="284" r:id="rId23"/>
+    <p:sldId id="289" r:id="rId24"/>
+    <p:sldId id="288" r:id="rId25"/>
+    <p:sldId id="279" r:id="rId26"/>
+    <p:sldId id="281" r:id="rId27"/>
   </p:sldIdLst>
   <p:sldSz cx="12192000" cy="6858000"/>
   <p:notesSz cx="6858000" cy="9144000"/>
@@ -1716,11 +1720,6 @@
         </p:spPr>
       </p:sp>
     </p:spTree>
-    <p:extLst>
-      <p:ext uri="{BB962C8B-B14F-4D97-AF65-F5344CB8AC3E}">
-        <p14:creationId xmlns:p14="http://schemas.microsoft.com/office/powerpoint/2010/main" val="3669057616"/>
-      </p:ext>
-    </p:extLst>
   </p:cSld>
   <p:clrMapOvr>
     <a:masterClrMapping/>
@@ -1845,7 +1844,7 @@
     </p:spTree>
     <p:extLst>
       <p:ext uri="{BB962C8B-B14F-4D97-AF65-F5344CB8AC3E}">
-        <p14:creationId xmlns:p14="http://schemas.microsoft.com/office/powerpoint/2010/main" val="4266631345"/>
+        <p14:creationId xmlns:p14="http://schemas.microsoft.com/office/powerpoint/2010/main" val="3669057616"/>
       </p:ext>
     </p:extLst>
   </p:cSld>
@@ -1972,7 +1971,7 @@
     </p:spTree>
     <p:extLst>
       <p:ext uri="{BB962C8B-B14F-4D97-AF65-F5344CB8AC3E}">
-        <p14:creationId xmlns:p14="http://schemas.microsoft.com/office/powerpoint/2010/main" val="3088959590"/>
+        <p14:creationId xmlns:p14="http://schemas.microsoft.com/office/powerpoint/2010/main" val="4053668582"/>
       </p:ext>
     </p:extLst>
   </p:cSld>
@@ -2099,7 +2098,7 @@
     </p:spTree>
     <p:extLst>
       <p:ext uri="{BB962C8B-B14F-4D97-AF65-F5344CB8AC3E}">
-        <p14:creationId xmlns:p14="http://schemas.microsoft.com/office/powerpoint/2010/main" val="2907566276"/>
+        <p14:creationId xmlns:p14="http://schemas.microsoft.com/office/powerpoint/2010/main" val="4266631345"/>
       </p:ext>
     </p:extLst>
   </p:cSld>
@@ -2226,7 +2225,7 @@
     </p:spTree>
     <p:extLst>
       <p:ext uri="{BB962C8B-B14F-4D97-AF65-F5344CB8AC3E}">
-        <p14:creationId xmlns:p14="http://schemas.microsoft.com/office/powerpoint/2010/main" val="1423611811"/>
+        <p14:creationId xmlns:p14="http://schemas.microsoft.com/office/powerpoint/2010/main" val="3088959590"/>
       </p:ext>
     </p:extLst>
   </p:cSld>
@@ -2473,6 +2472,11 @@
         </p:spPr>
       </p:sp>
     </p:spTree>
+    <p:extLst>
+      <p:ext uri="{BB962C8B-B14F-4D97-AF65-F5344CB8AC3E}">
+        <p14:creationId xmlns:p14="http://schemas.microsoft.com/office/powerpoint/2010/main" val="2023147816"/>
+      </p:ext>
+    </p:extLst>
   </p:cSld>
   <p:clrMapOvr>
     <a:masterClrMapping/>
@@ -2481,6 +2485,260 @@
 </file>
 
 <file path=ppt/notesSlides/notesSlide21.xml><?xml version="1.0" encoding="utf-8"?>
+<p:notes xmlns:a="http://schemas.openxmlformats.org/drawingml/2006/main" xmlns:r="http://schemas.openxmlformats.org/officeDocument/2006/relationships" xmlns:p="http://schemas.openxmlformats.org/presentationml/2006/main" showMasterSp="0" showMasterPhAnim="0">
+  <p:cSld>
+    <p:spTree>
+      <p:nvGrpSpPr>
+        <p:cNvPr id="1" name="Shape 293"/>
+        <p:cNvGrpSpPr/>
+        <p:nvPr/>
+      </p:nvGrpSpPr>
+      <p:grpSpPr>
+        <a:xfrm>
+          <a:off x="0" y="0"/>
+          <a:ext cx="0" cy="0"/>
+          <a:chOff x="0" y="0"/>
+          <a:chExt cx="0" cy="0"/>
+        </a:xfrm>
+      </p:grpSpPr>
+      <p:sp>
+        <p:nvSpPr>
+          <p:cNvPr id="1048756" name="Google Shape;294;p21:notes"/>
+          <p:cNvSpPr txBox="1">
+            <a:spLocks noGrp="1"/>
+          </p:cNvSpPr>
+          <p:nvPr>
+            <p:ph type="body" idx="1"/>
+          </p:nvPr>
+        </p:nvSpPr>
+        <p:spPr>
+          <a:xfrm>
+            <a:off x="685800" y="4343400"/>
+            <a:ext cx="5486400" cy="4114800"/>
+          </a:xfrm>
+          <a:prstGeom prst="rect">
+            <a:avLst/>
+          </a:prstGeom>
+          <a:noFill/>
+          <a:ln>
+            <a:noFill/>
+          </a:ln>
+        </p:spPr>
+        <p:txBody>
+          <a:bodyPr spcFirstLastPara="1" wrap="square" lIns="91425" tIns="91425" rIns="91425" bIns="91425" anchor="t" anchorCtr="0">
+            <a:noAutofit/>
+          </a:bodyPr>
+          <a:lstStyle/>
+          <a:p>
+            <a:pPr marL="0" lvl="0" indent="0" algn="l" rtl="0">
+              <a:lnSpc>
+                <a:spcPct val="100000"/>
+              </a:lnSpc>
+              <a:spcBef>
+                <a:spcPts val="0"/>
+              </a:spcBef>
+              <a:spcAft>
+                <a:spcPts val="0"/>
+              </a:spcAft>
+              <a:buSzPts val="1100"/>
+              <a:buNone/>
+            </a:pPr>
+            <a:endParaRPr/>
+          </a:p>
+        </p:txBody>
+      </p:sp>
+      <p:sp>
+        <p:nvSpPr>
+          <p:cNvPr id="1048757" name="Google Shape;295;p21:notes"/>
+          <p:cNvSpPr>
+            <a:spLocks noGrp="1" noRot="1" noChangeAspect="1"/>
+          </p:cNvSpPr>
+          <p:nvPr>
+            <p:ph type="sldImg" idx="2"/>
+          </p:nvPr>
+        </p:nvSpPr>
+        <p:spPr>
+          <a:xfrm>
+            <a:off x="381000" y="685800"/>
+            <a:ext cx="6096000" cy="3429000"/>
+          </a:xfrm>
+          <a:custGeom>
+            <a:avLst/>
+            <a:gdLst/>
+            <a:ahLst/>
+            <a:cxnLst/>
+            <a:rect l="l" t="t" r="r" b="b"/>
+            <a:pathLst>
+              <a:path w="120000" h="120000" extrusionOk="0">
+                <a:moveTo>
+                  <a:pt x="0" y="0"/>
+                </a:moveTo>
+                <a:lnTo>
+                  <a:pt x="120000" y="0"/>
+                </a:lnTo>
+                <a:lnTo>
+                  <a:pt x="120000" y="120000"/>
+                </a:lnTo>
+                <a:lnTo>
+                  <a:pt x="0" y="120000"/>
+                </a:lnTo>
+                <a:close/>
+              </a:path>
+            </a:pathLst>
+          </a:custGeom>
+          <a:noFill/>
+          <a:ln w="9525" cap="flat" cmpd="sng">
+            <a:solidFill>
+              <a:srgbClr val="000000"/>
+            </a:solidFill>
+            <a:prstDash val="solid"/>
+            <a:round/>
+            <a:headEnd type="none" w="sm" len="sm"/>
+            <a:tailEnd type="none" w="sm" len="sm"/>
+          </a:ln>
+        </p:spPr>
+      </p:sp>
+    </p:spTree>
+    <p:extLst>
+      <p:ext uri="{BB962C8B-B14F-4D97-AF65-F5344CB8AC3E}">
+        <p14:creationId xmlns:p14="http://schemas.microsoft.com/office/powerpoint/2010/main" val="2907566276"/>
+      </p:ext>
+    </p:extLst>
+  </p:cSld>
+  <p:clrMapOvr>
+    <a:masterClrMapping/>
+  </p:clrMapOvr>
+</p:notes>
+</file>
+
+<file path=ppt/notesSlides/notesSlide22.xml><?xml version="1.0" encoding="utf-8"?>
+<p:notes xmlns:a="http://schemas.openxmlformats.org/drawingml/2006/main" xmlns:r="http://schemas.openxmlformats.org/officeDocument/2006/relationships" xmlns:p="http://schemas.openxmlformats.org/presentationml/2006/main" showMasterSp="0" showMasterPhAnim="0">
+  <p:cSld>
+    <p:spTree>
+      <p:nvGrpSpPr>
+        <p:cNvPr id="1" name="Shape 293"/>
+        <p:cNvGrpSpPr/>
+        <p:nvPr/>
+      </p:nvGrpSpPr>
+      <p:grpSpPr>
+        <a:xfrm>
+          <a:off x="0" y="0"/>
+          <a:ext cx="0" cy="0"/>
+          <a:chOff x="0" y="0"/>
+          <a:chExt cx="0" cy="0"/>
+        </a:xfrm>
+      </p:grpSpPr>
+      <p:sp>
+        <p:nvSpPr>
+          <p:cNvPr id="1048756" name="Google Shape;294;p21:notes"/>
+          <p:cNvSpPr txBox="1">
+            <a:spLocks noGrp="1"/>
+          </p:cNvSpPr>
+          <p:nvPr>
+            <p:ph type="body" idx="1"/>
+          </p:nvPr>
+        </p:nvSpPr>
+        <p:spPr>
+          <a:xfrm>
+            <a:off x="685800" y="4343400"/>
+            <a:ext cx="5486400" cy="4114800"/>
+          </a:xfrm>
+          <a:prstGeom prst="rect">
+            <a:avLst/>
+          </a:prstGeom>
+          <a:noFill/>
+          <a:ln>
+            <a:noFill/>
+          </a:ln>
+        </p:spPr>
+        <p:txBody>
+          <a:bodyPr spcFirstLastPara="1" wrap="square" lIns="91425" tIns="91425" rIns="91425" bIns="91425" anchor="t" anchorCtr="0">
+            <a:noAutofit/>
+          </a:bodyPr>
+          <a:lstStyle/>
+          <a:p>
+            <a:pPr marL="0" lvl="0" indent="0" algn="l" rtl="0">
+              <a:lnSpc>
+                <a:spcPct val="100000"/>
+              </a:lnSpc>
+              <a:spcBef>
+                <a:spcPts val="0"/>
+              </a:spcBef>
+              <a:spcAft>
+                <a:spcPts val="0"/>
+              </a:spcAft>
+              <a:buSzPts val="1100"/>
+              <a:buNone/>
+            </a:pPr>
+            <a:endParaRPr/>
+          </a:p>
+        </p:txBody>
+      </p:sp>
+      <p:sp>
+        <p:nvSpPr>
+          <p:cNvPr id="1048757" name="Google Shape;295;p21:notes"/>
+          <p:cNvSpPr>
+            <a:spLocks noGrp="1" noRot="1" noChangeAspect="1"/>
+          </p:cNvSpPr>
+          <p:nvPr>
+            <p:ph type="sldImg" idx="2"/>
+          </p:nvPr>
+        </p:nvSpPr>
+        <p:spPr>
+          <a:xfrm>
+            <a:off x="381000" y="685800"/>
+            <a:ext cx="6096000" cy="3429000"/>
+          </a:xfrm>
+          <a:custGeom>
+            <a:avLst/>
+            <a:gdLst/>
+            <a:ahLst/>
+            <a:cxnLst/>
+            <a:rect l="l" t="t" r="r" b="b"/>
+            <a:pathLst>
+              <a:path w="120000" h="120000" extrusionOk="0">
+                <a:moveTo>
+                  <a:pt x="0" y="0"/>
+                </a:moveTo>
+                <a:lnTo>
+                  <a:pt x="120000" y="0"/>
+                </a:lnTo>
+                <a:lnTo>
+                  <a:pt x="120000" y="120000"/>
+                </a:lnTo>
+                <a:lnTo>
+                  <a:pt x="0" y="120000"/>
+                </a:lnTo>
+                <a:close/>
+              </a:path>
+            </a:pathLst>
+          </a:custGeom>
+          <a:noFill/>
+          <a:ln w="9525" cap="flat" cmpd="sng">
+            <a:solidFill>
+              <a:srgbClr val="000000"/>
+            </a:solidFill>
+            <a:prstDash val="solid"/>
+            <a:round/>
+            <a:headEnd type="none" w="sm" len="sm"/>
+            <a:tailEnd type="none" w="sm" len="sm"/>
+          </a:ln>
+        </p:spPr>
+      </p:sp>
+    </p:spTree>
+    <p:extLst>
+      <p:ext uri="{BB962C8B-B14F-4D97-AF65-F5344CB8AC3E}">
+        <p14:creationId xmlns:p14="http://schemas.microsoft.com/office/powerpoint/2010/main" val="1423611811"/>
+      </p:ext>
+    </p:extLst>
+  </p:cSld>
+  <p:clrMapOvr>
+    <a:masterClrMapping/>
+  </p:clrMapOvr>
+</p:notes>
+</file>
+
+<file path=ppt/notesSlides/notesSlide23.xml><?xml version="1.0" encoding="utf-8"?>
 <p:notes xmlns:a="http://schemas.openxmlformats.org/drawingml/2006/main" xmlns:r="http://schemas.openxmlformats.org/officeDocument/2006/relationships" xmlns:p="http://schemas.openxmlformats.org/presentationml/2006/main" showMasterSp="0" showMasterPhAnim="0">
   <p:cSld>
     <p:spTree>
@@ -2595,6 +2853,11 @@
         </p:spPr>
       </p:sp>
     </p:spTree>
+    <p:extLst>
+      <p:ext uri="{BB962C8B-B14F-4D97-AF65-F5344CB8AC3E}">
+        <p14:creationId xmlns:p14="http://schemas.microsoft.com/office/powerpoint/2010/main" val="2132822393"/>
+      </p:ext>
+    </p:extLst>
   </p:cSld>
   <p:clrMapOvr>
     <a:masterClrMapping/>
@@ -2602,7 +2865,256 @@
 </p:notes>
 </file>
 
-<file path=ppt/notesSlides/notesSlide22.xml><?xml version="1.0" encoding="utf-8"?>
+<file path=ppt/notesSlides/notesSlide24.xml><?xml version="1.0" encoding="utf-8"?>
+<p:notes xmlns:a="http://schemas.openxmlformats.org/drawingml/2006/main" xmlns:r="http://schemas.openxmlformats.org/officeDocument/2006/relationships" xmlns:p="http://schemas.openxmlformats.org/presentationml/2006/main" showMasterSp="0" showMasterPhAnim="0">
+  <p:cSld>
+    <p:spTree>
+      <p:nvGrpSpPr>
+        <p:cNvPr id="1" name="Shape 302"/>
+        <p:cNvGrpSpPr/>
+        <p:nvPr/>
+      </p:nvGrpSpPr>
+      <p:grpSpPr>
+        <a:xfrm>
+          <a:off x="0" y="0"/>
+          <a:ext cx="0" cy="0"/>
+          <a:chOff x="0" y="0"/>
+          <a:chExt cx="0" cy="0"/>
+        </a:xfrm>
+      </p:grpSpPr>
+      <p:sp>
+        <p:nvSpPr>
+          <p:cNvPr id="1048763" name="Google Shape;303;p22:notes"/>
+          <p:cNvSpPr txBox="1">
+            <a:spLocks noGrp="1"/>
+          </p:cNvSpPr>
+          <p:nvPr>
+            <p:ph type="body" idx="1"/>
+          </p:nvPr>
+        </p:nvSpPr>
+        <p:spPr>
+          <a:xfrm>
+            <a:off x="685800" y="4343400"/>
+            <a:ext cx="5486400" cy="4114800"/>
+          </a:xfrm>
+          <a:prstGeom prst="rect">
+            <a:avLst/>
+          </a:prstGeom>
+          <a:noFill/>
+          <a:ln>
+            <a:noFill/>
+          </a:ln>
+        </p:spPr>
+        <p:txBody>
+          <a:bodyPr spcFirstLastPara="1" wrap="square" lIns="91425" tIns="91425" rIns="91425" bIns="91425" anchor="t" anchorCtr="0">
+            <a:noAutofit/>
+          </a:bodyPr>
+          <a:lstStyle/>
+          <a:p>
+            <a:pPr marL="0" lvl="0" indent="0" algn="l" rtl="0">
+              <a:lnSpc>
+                <a:spcPct val="100000"/>
+              </a:lnSpc>
+              <a:spcBef>
+                <a:spcPts val="0"/>
+              </a:spcBef>
+              <a:spcAft>
+                <a:spcPts val="0"/>
+              </a:spcAft>
+              <a:buSzPts val="1100"/>
+              <a:buNone/>
+            </a:pPr>
+            <a:endParaRPr/>
+          </a:p>
+        </p:txBody>
+      </p:sp>
+      <p:sp>
+        <p:nvSpPr>
+          <p:cNvPr id="1048764" name="Google Shape;304;p22:notes"/>
+          <p:cNvSpPr>
+            <a:spLocks noGrp="1" noRot="1" noChangeAspect="1"/>
+          </p:cNvSpPr>
+          <p:nvPr>
+            <p:ph type="sldImg" idx="2"/>
+          </p:nvPr>
+        </p:nvSpPr>
+        <p:spPr>
+          <a:xfrm>
+            <a:off x="381000" y="685800"/>
+            <a:ext cx="6096000" cy="3429000"/>
+          </a:xfrm>
+          <a:custGeom>
+            <a:avLst/>
+            <a:gdLst/>
+            <a:ahLst/>
+            <a:cxnLst/>
+            <a:rect l="l" t="t" r="r" b="b"/>
+            <a:pathLst>
+              <a:path w="120000" h="120000" extrusionOk="0">
+                <a:moveTo>
+                  <a:pt x="0" y="0"/>
+                </a:moveTo>
+                <a:lnTo>
+                  <a:pt x="120000" y="0"/>
+                </a:lnTo>
+                <a:lnTo>
+                  <a:pt x="120000" y="120000"/>
+                </a:lnTo>
+                <a:lnTo>
+                  <a:pt x="0" y="120000"/>
+                </a:lnTo>
+                <a:close/>
+              </a:path>
+            </a:pathLst>
+          </a:custGeom>
+          <a:noFill/>
+          <a:ln w="9525" cap="flat" cmpd="sng">
+            <a:solidFill>
+              <a:srgbClr val="000000"/>
+            </a:solidFill>
+            <a:prstDash val="solid"/>
+            <a:round/>
+            <a:headEnd type="none" w="sm" len="sm"/>
+            <a:tailEnd type="none" w="sm" len="sm"/>
+          </a:ln>
+        </p:spPr>
+      </p:sp>
+    </p:spTree>
+    <p:extLst>
+      <p:ext uri="{BB962C8B-B14F-4D97-AF65-F5344CB8AC3E}">
+        <p14:creationId xmlns:p14="http://schemas.microsoft.com/office/powerpoint/2010/main" val="1730997714"/>
+      </p:ext>
+    </p:extLst>
+  </p:cSld>
+  <p:clrMapOvr>
+    <a:masterClrMapping/>
+  </p:clrMapOvr>
+</p:notes>
+</file>
+
+<file path=ppt/notesSlides/notesSlide25.xml><?xml version="1.0" encoding="utf-8"?>
+<p:notes xmlns:a="http://schemas.openxmlformats.org/drawingml/2006/main" xmlns:r="http://schemas.openxmlformats.org/officeDocument/2006/relationships" xmlns:p="http://schemas.openxmlformats.org/presentationml/2006/main" showMasterSp="0" showMasterPhAnim="0">
+  <p:cSld>
+    <p:spTree>
+      <p:nvGrpSpPr>
+        <p:cNvPr id="1" name="Shape 302"/>
+        <p:cNvGrpSpPr/>
+        <p:nvPr/>
+      </p:nvGrpSpPr>
+      <p:grpSpPr>
+        <a:xfrm>
+          <a:off x="0" y="0"/>
+          <a:ext cx="0" cy="0"/>
+          <a:chOff x="0" y="0"/>
+          <a:chExt cx="0" cy="0"/>
+        </a:xfrm>
+      </p:grpSpPr>
+      <p:sp>
+        <p:nvSpPr>
+          <p:cNvPr id="1048763" name="Google Shape;303;p22:notes"/>
+          <p:cNvSpPr txBox="1">
+            <a:spLocks noGrp="1"/>
+          </p:cNvSpPr>
+          <p:nvPr>
+            <p:ph type="body" idx="1"/>
+          </p:nvPr>
+        </p:nvSpPr>
+        <p:spPr>
+          <a:xfrm>
+            <a:off x="685800" y="4343400"/>
+            <a:ext cx="5486400" cy="4114800"/>
+          </a:xfrm>
+          <a:prstGeom prst="rect">
+            <a:avLst/>
+          </a:prstGeom>
+          <a:noFill/>
+          <a:ln>
+            <a:noFill/>
+          </a:ln>
+        </p:spPr>
+        <p:txBody>
+          <a:bodyPr spcFirstLastPara="1" wrap="square" lIns="91425" tIns="91425" rIns="91425" bIns="91425" anchor="t" anchorCtr="0">
+            <a:noAutofit/>
+          </a:bodyPr>
+          <a:lstStyle/>
+          <a:p>
+            <a:pPr marL="0" lvl="0" indent="0" algn="l" rtl="0">
+              <a:lnSpc>
+                <a:spcPct val="100000"/>
+              </a:lnSpc>
+              <a:spcBef>
+                <a:spcPts val="0"/>
+              </a:spcBef>
+              <a:spcAft>
+                <a:spcPts val="0"/>
+              </a:spcAft>
+              <a:buSzPts val="1100"/>
+              <a:buNone/>
+            </a:pPr>
+            <a:endParaRPr/>
+          </a:p>
+        </p:txBody>
+      </p:sp>
+      <p:sp>
+        <p:nvSpPr>
+          <p:cNvPr id="1048764" name="Google Shape;304;p22:notes"/>
+          <p:cNvSpPr>
+            <a:spLocks noGrp="1" noRot="1" noChangeAspect="1"/>
+          </p:cNvSpPr>
+          <p:nvPr>
+            <p:ph type="sldImg" idx="2"/>
+          </p:nvPr>
+        </p:nvSpPr>
+        <p:spPr>
+          <a:xfrm>
+            <a:off x="381000" y="685800"/>
+            <a:ext cx="6096000" cy="3429000"/>
+          </a:xfrm>
+          <a:custGeom>
+            <a:avLst/>
+            <a:gdLst/>
+            <a:ahLst/>
+            <a:cxnLst/>
+            <a:rect l="l" t="t" r="r" b="b"/>
+            <a:pathLst>
+              <a:path w="120000" h="120000" extrusionOk="0">
+                <a:moveTo>
+                  <a:pt x="0" y="0"/>
+                </a:moveTo>
+                <a:lnTo>
+                  <a:pt x="120000" y="0"/>
+                </a:lnTo>
+                <a:lnTo>
+                  <a:pt x="120000" y="120000"/>
+                </a:lnTo>
+                <a:lnTo>
+                  <a:pt x="0" y="120000"/>
+                </a:lnTo>
+                <a:close/>
+              </a:path>
+            </a:pathLst>
+          </a:custGeom>
+          <a:noFill/>
+          <a:ln w="9525" cap="flat" cmpd="sng">
+            <a:solidFill>
+              <a:srgbClr val="000000"/>
+            </a:solidFill>
+            <a:prstDash val="solid"/>
+            <a:round/>
+            <a:headEnd type="none" w="sm" len="sm"/>
+            <a:tailEnd type="none" w="sm" len="sm"/>
+          </a:ln>
+        </p:spPr>
+      </p:sp>
+    </p:spTree>
+  </p:cSld>
+  <p:clrMapOvr>
+    <a:masterClrMapping/>
+  </p:clrMapOvr>
+</p:notes>
+</file>
+
+<file path=ppt/notesSlides/notesSlide26.xml><?xml version="1.0" encoding="utf-8"?>
 <p:notes xmlns:a="http://schemas.openxmlformats.org/drawingml/2006/main" xmlns:r="http://schemas.openxmlformats.org/officeDocument/2006/relationships" xmlns:p="http://schemas.openxmlformats.org/presentationml/2006/main" showMasterSp="0" showMasterPhAnim="0">
   <p:cSld>
     <p:spTree>
@@ -19655,6 +20167,795 @@
         </p:spPr>
         <p:txBody>
           <a:bodyPr spcFirstLastPara="1" wrap="square" lIns="91425" tIns="45700" rIns="91425" bIns="45700" anchor="ctr" anchorCtr="0">
+            <a:normAutofit fontScale="90000"/>
+          </a:bodyPr>
+          <a:lstStyle/>
+          <a:p>
+            <a:pPr marL="0" lvl="0" indent="0" algn="l" rtl="0">
+              <a:lnSpc>
+                <a:spcPct val="90000"/>
+              </a:lnSpc>
+              <a:spcBef>
+                <a:spcPts val="0"/>
+              </a:spcBef>
+              <a:spcAft>
+                <a:spcPts val="0"/>
+              </a:spcAft>
+              <a:buClr>
+                <a:schemeClr val="dk1"/>
+              </a:buClr>
+              <a:buSzPct val="111111"/>
+              <a:buFont typeface="Calibri"/>
+              <a:buNone/>
+            </a:pPr>
+            <a:r>
+              <a:rPr lang="en-US" b="1"/>
+              <a:t>Minimum Hardware &amp; Software Requirement</a:t>
+            </a:r>
+          </a:p>
+        </p:txBody>
+      </p:sp>
+      <p:sp>
+        <p:nvSpPr>
+          <p:cNvPr id="1048752" name="Google Shape;298;p21"/>
+          <p:cNvSpPr/>
+          <p:nvPr/>
+        </p:nvSpPr>
+        <p:spPr>
+          <a:xfrm>
+            <a:off x="1" y="0"/>
+            <a:ext cx="1764099" cy="1022556"/>
+          </a:xfrm>
+          <a:custGeom>
+            <a:avLst/>
+            <a:gdLst/>
+            <a:ahLst/>
+            <a:cxnLst/>
+            <a:rect l="l" t="t" r="r" b="b"/>
+            <a:pathLst>
+              <a:path w="1764099" h="1558212" extrusionOk="0">
+                <a:moveTo>
+                  <a:pt x="0" y="0"/>
+                </a:moveTo>
+                <a:lnTo>
+                  <a:pt x="1764099" y="0"/>
+                </a:lnTo>
+                <a:lnTo>
+                  <a:pt x="1042087" y="1558212"/>
+                </a:lnTo>
+                <a:lnTo>
+                  <a:pt x="0" y="1558212"/>
+                </a:lnTo>
+                <a:close/>
+              </a:path>
+            </a:pathLst>
+          </a:custGeom>
+          <a:solidFill>
+            <a:schemeClr val="accent4"/>
+          </a:solidFill>
+          <a:ln>
+            <a:noFill/>
+          </a:ln>
+        </p:spPr>
+        <p:txBody>
+          <a:bodyPr spcFirstLastPara="1" wrap="square" lIns="91425" tIns="45700" rIns="91425" bIns="45700" anchor="ctr" anchorCtr="0">
+            <a:noAutofit/>
+          </a:bodyPr>
+          <a:lstStyle/>
+          <a:p>
+            <a:pPr marL="0" marR="0" lvl="0" indent="0" algn="ctr" rtl="0">
+              <a:lnSpc>
+                <a:spcPct val="100000"/>
+              </a:lnSpc>
+              <a:spcBef>
+                <a:spcPts val="0"/>
+              </a:spcBef>
+              <a:spcAft>
+                <a:spcPts val="0"/>
+              </a:spcAft>
+              <a:buClr>
+                <a:srgbClr val="000000"/>
+              </a:buClr>
+              <a:buSzPts val="1800"/>
+              <a:buFont typeface="Arial"/>
+              <a:buNone/>
+            </a:pPr>
+            <a:endParaRPr sz="1800" b="0" i="0" u="none" strike="noStrike" cap="none">
+              <a:solidFill>
+                <a:schemeClr val="lt1"/>
+              </a:solidFill>
+              <a:latin typeface="Calibri"/>
+              <a:ea typeface="Calibri"/>
+              <a:cs typeface="Calibri"/>
+              <a:sym typeface="Calibri"/>
+            </a:endParaRPr>
+          </a:p>
+        </p:txBody>
+      </p:sp>
+      <p:sp>
+        <p:nvSpPr>
+          <p:cNvPr id="1048753" name="Google Shape;299;p21"/>
+          <p:cNvSpPr/>
+          <p:nvPr/>
+        </p:nvSpPr>
+        <p:spPr>
+          <a:xfrm>
+            <a:off x="1" y="1190196"/>
+            <a:ext cx="12191999" cy="5667804"/>
+          </a:xfrm>
+          <a:custGeom>
+            <a:avLst/>
+            <a:gdLst/>
+            <a:ahLst/>
+            <a:cxnLst/>
+            <a:rect l="l" t="t" r="r" b="b"/>
+            <a:pathLst>
+              <a:path w="12191999" h="5166360" extrusionOk="0">
+                <a:moveTo>
+                  <a:pt x="0" y="0"/>
+                </a:moveTo>
+                <a:lnTo>
+                  <a:pt x="1822388" y="0"/>
+                </a:lnTo>
+                <a:lnTo>
+                  <a:pt x="6468290" y="0"/>
+                </a:lnTo>
+                <a:lnTo>
+                  <a:pt x="7796394" y="0"/>
+                </a:lnTo>
+                <a:lnTo>
+                  <a:pt x="8376834" y="0"/>
+                </a:lnTo>
+                <a:lnTo>
+                  <a:pt x="9704938" y="0"/>
+                </a:lnTo>
+                <a:lnTo>
+                  <a:pt x="9704938" y="2"/>
+                </a:lnTo>
+                <a:lnTo>
+                  <a:pt x="10283456" y="2"/>
+                </a:lnTo>
+                <a:lnTo>
+                  <a:pt x="10863897" y="2"/>
+                </a:lnTo>
+                <a:lnTo>
+                  <a:pt x="12191999" y="2"/>
+                </a:lnTo>
+                <a:lnTo>
+                  <a:pt x="12191999" y="5166360"/>
+                </a:lnTo>
+                <a:lnTo>
+                  <a:pt x="0" y="5166360"/>
+                </a:lnTo>
+                <a:lnTo>
+                  <a:pt x="0" y="2604436"/>
+                </a:lnTo>
+                <a:lnTo>
+                  <a:pt x="862341" y="743371"/>
+                </a:lnTo>
+                <a:lnTo>
+                  <a:pt x="0" y="743371"/>
+                </a:lnTo>
+                <a:lnTo>
+                  <a:pt x="0" y="742508"/>
+                </a:lnTo>
+                <a:lnTo>
+                  <a:pt x="92826" y="742508"/>
+                </a:lnTo>
+                <a:lnTo>
+                  <a:pt x="406486" y="742508"/>
+                </a:lnTo>
+                <a:lnTo>
+                  <a:pt x="406486" y="742507"/>
+                </a:lnTo>
+                <a:lnTo>
+                  <a:pt x="862741" y="742507"/>
+                </a:lnTo>
+                <a:lnTo>
+                  <a:pt x="1206388" y="864"/>
+                </a:lnTo>
+                <a:lnTo>
+                  <a:pt x="748500" y="864"/>
+                </a:lnTo>
+                <a:lnTo>
+                  <a:pt x="0" y="864"/>
+                </a:lnTo>
+                <a:close/>
+              </a:path>
+            </a:pathLst>
+          </a:custGeom>
+          <a:solidFill>
+            <a:srgbClr val="A6A6A6">
+              <a:alpha val="49411"/>
+            </a:srgbClr>
+          </a:solidFill>
+          <a:ln>
+            <a:noFill/>
+          </a:ln>
+        </p:spPr>
+        <p:txBody>
+          <a:bodyPr spcFirstLastPara="1" wrap="square" lIns="91425" tIns="45700" rIns="91425" bIns="45700" anchor="ctr" anchorCtr="0">
+            <a:noAutofit/>
+          </a:bodyPr>
+          <a:lstStyle/>
+          <a:p>
+            <a:pPr marL="0" marR="0" lvl="0" indent="0" algn="ctr" rtl="0">
+              <a:lnSpc>
+                <a:spcPct val="100000"/>
+              </a:lnSpc>
+              <a:spcBef>
+                <a:spcPts val="0"/>
+              </a:spcBef>
+              <a:spcAft>
+                <a:spcPts val="0"/>
+              </a:spcAft>
+              <a:buClr>
+                <a:srgbClr val="000000"/>
+              </a:buClr>
+              <a:buSzPts val="1800"/>
+              <a:buFont typeface="Arial"/>
+              <a:buNone/>
+            </a:pPr>
+            <a:endParaRPr sz="1800" b="0" i="0" u="none" strike="noStrike" cap="none">
+              <a:solidFill>
+                <a:schemeClr val="lt1"/>
+              </a:solidFill>
+              <a:latin typeface="Calibri"/>
+              <a:ea typeface="Calibri"/>
+              <a:cs typeface="Calibri"/>
+              <a:sym typeface="Calibri"/>
+            </a:endParaRPr>
+          </a:p>
+        </p:txBody>
+      </p:sp>
+      <p:sp>
+        <p:nvSpPr>
+          <p:cNvPr id="1048754" name="Google Shape;300;p21"/>
+          <p:cNvSpPr/>
+          <p:nvPr/>
+        </p:nvSpPr>
+        <p:spPr>
+          <a:xfrm>
+            <a:off x="0" y="1190196"/>
+            <a:ext cx="971654" cy="2096979"/>
+          </a:xfrm>
+          <a:custGeom>
+            <a:avLst/>
+            <a:gdLst/>
+            <a:ahLst/>
+            <a:cxnLst/>
+            <a:rect l="l" t="t" r="r" b="b"/>
+            <a:pathLst>
+              <a:path w="971654" h="2096979" extrusionOk="0">
+                <a:moveTo>
+                  <a:pt x="0" y="0"/>
+                </a:moveTo>
+                <a:lnTo>
+                  <a:pt x="971654" y="0"/>
+                </a:lnTo>
+                <a:lnTo>
+                  <a:pt x="0" y="2096979"/>
+                </a:lnTo>
+                <a:close/>
+              </a:path>
+            </a:pathLst>
+          </a:custGeom>
+          <a:solidFill>
+            <a:srgbClr val="404040"/>
+          </a:solidFill>
+          <a:ln>
+            <a:noFill/>
+          </a:ln>
+        </p:spPr>
+        <p:txBody>
+          <a:bodyPr spcFirstLastPara="1" wrap="square" lIns="91425" tIns="45700" rIns="91425" bIns="45700" anchor="ctr" anchorCtr="0">
+            <a:noAutofit/>
+          </a:bodyPr>
+          <a:lstStyle/>
+          <a:p>
+            <a:pPr marL="0" marR="0" lvl="0" indent="0" algn="ctr" rtl="0">
+              <a:lnSpc>
+                <a:spcPct val="100000"/>
+              </a:lnSpc>
+              <a:spcBef>
+                <a:spcPts val="0"/>
+              </a:spcBef>
+              <a:spcAft>
+                <a:spcPts val="0"/>
+              </a:spcAft>
+              <a:buClr>
+                <a:srgbClr val="000000"/>
+              </a:buClr>
+              <a:buSzPts val="1800"/>
+              <a:buFont typeface="Arial"/>
+              <a:buNone/>
+            </a:pPr>
+            <a:endParaRPr sz="1800" b="0" i="0" u="none" strike="noStrike" cap="none">
+              <a:solidFill>
+                <a:schemeClr val="lt1"/>
+              </a:solidFill>
+              <a:latin typeface="Calibri"/>
+              <a:ea typeface="Calibri"/>
+              <a:cs typeface="Calibri"/>
+              <a:sym typeface="Calibri"/>
+            </a:endParaRPr>
+          </a:p>
+        </p:txBody>
+      </p:sp>
+      <p:sp>
+        <p:nvSpPr>
+          <p:cNvPr id="1048755" name="Google Shape;301;p21"/>
+          <p:cNvSpPr txBox="1">
+            <a:spLocks noGrp="1"/>
+          </p:cNvSpPr>
+          <p:nvPr>
+            <p:ph type="body" idx="1"/>
+          </p:nvPr>
+        </p:nvSpPr>
+        <p:spPr>
+          <a:xfrm>
+            <a:off x="1309234" y="1317523"/>
+            <a:ext cx="10636960" cy="5329083"/>
+          </a:xfrm>
+          <a:prstGeom prst="rect">
+            <a:avLst/>
+          </a:prstGeom>
+          <a:noFill/>
+          <a:ln>
+            <a:noFill/>
+          </a:ln>
+        </p:spPr>
+        <p:txBody>
+          <a:bodyPr spcFirstLastPara="1" wrap="square" lIns="91425" tIns="45700" rIns="91425" bIns="45700" anchor="t" anchorCtr="0">
+            <a:noAutofit/>
+          </a:bodyPr>
+          <a:lstStyle/>
+          <a:p>
+            <a:pPr marL="0" lvl="0" indent="0" algn="l" rtl="0">
+              <a:lnSpc>
+                <a:spcPct val="150000"/>
+              </a:lnSpc>
+              <a:spcBef>
+                <a:spcPts val="0"/>
+              </a:spcBef>
+              <a:spcAft>
+                <a:spcPts val="0"/>
+              </a:spcAft>
+              <a:buClr>
+                <a:schemeClr val="dk1"/>
+              </a:buClr>
+              <a:buSzPts val="2000"/>
+              <a:buNone/>
+            </a:pPr>
+            <a:r>
+              <a:rPr lang="en-US" sz="1800" b="1">
+                <a:latin typeface="Times New Roman"/>
+                <a:ea typeface="Times New Roman"/>
+                <a:cs typeface="Times New Roman"/>
+                <a:sym typeface="Times New Roman"/>
+              </a:rPr>
+              <a:t>Software Requirements:</a:t>
+            </a:r>
+            <a:endParaRPr sz="2400" b="1"/>
+          </a:p>
+          <a:p>
+            <a:pPr marL="0" lvl="0" indent="0" algn="l" rtl="0">
+              <a:lnSpc>
+                <a:spcPct val="150000"/>
+              </a:lnSpc>
+              <a:spcBef>
+                <a:spcPts val="1000"/>
+              </a:spcBef>
+              <a:spcAft>
+                <a:spcPts val="0"/>
+              </a:spcAft>
+              <a:buClr>
+                <a:schemeClr val="dk1"/>
+              </a:buClr>
+              <a:buSzPts val="2000"/>
+              <a:buNone/>
+            </a:pPr>
+            <a:r>
+              <a:rPr lang="en-US" sz="1800">
+                <a:latin typeface="Times New Roman"/>
+                <a:ea typeface="Times New Roman"/>
+                <a:cs typeface="Times New Roman"/>
+                <a:sym typeface="Times New Roman"/>
+              </a:rPr>
+              <a:t>	Operating system 	:   </a:t>
+            </a:r>
+            <a:r>
+              <a:rPr lang="en-US" sz="1800" b="1">
+                <a:latin typeface="Times New Roman"/>
+                <a:ea typeface="Times New Roman"/>
+                <a:cs typeface="Times New Roman"/>
+                <a:sym typeface="Times New Roman"/>
+              </a:rPr>
+              <a:t>64 bit Windows 10</a:t>
+            </a:r>
+            <a:endParaRPr sz="2400" b="1"/>
+          </a:p>
+          <a:p>
+            <a:pPr marL="0" lvl="0" indent="0" algn="l" rtl="0">
+              <a:lnSpc>
+                <a:spcPct val="150000"/>
+              </a:lnSpc>
+              <a:spcBef>
+                <a:spcPts val="1000"/>
+              </a:spcBef>
+              <a:spcAft>
+                <a:spcPts val="0"/>
+              </a:spcAft>
+              <a:buClr>
+                <a:schemeClr val="dk1"/>
+              </a:buClr>
+              <a:buSzPts val="2000"/>
+              <a:buNone/>
+            </a:pPr>
+            <a:r>
+              <a:rPr lang="en-US" sz="1800">
+                <a:latin typeface="Times New Roman"/>
+                <a:ea typeface="Times New Roman"/>
+                <a:cs typeface="Times New Roman"/>
+                <a:sym typeface="Times New Roman"/>
+              </a:rPr>
+              <a:t>	Coding Language	:   </a:t>
+            </a:r>
+            <a:r>
+              <a:rPr lang="en-US" sz="1800" b="1">
+                <a:latin typeface="Times New Roman"/>
+                <a:ea typeface="Times New Roman"/>
+                <a:cs typeface="Times New Roman"/>
+                <a:sym typeface="Times New Roman"/>
+              </a:rPr>
+              <a:t>Python</a:t>
+            </a:r>
+            <a:endParaRPr sz="2400" b="1"/>
+          </a:p>
+          <a:p>
+            <a:pPr marL="0" lvl="0" indent="0" algn="l" rtl="0">
+              <a:lnSpc>
+                <a:spcPct val="150000"/>
+              </a:lnSpc>
+              <a:spcBef>
+                <a:spcPts val="1000"/>
+              </a:spcBef>
+              <a:spcAft>
+                <a:spcPts val="0"/>
+              </a:spcAft>
+              <a:buClr>
+                <a:schemeClr val="dk1"/>
+              </a:buClr>
+              <a:buSzPts val="2000"/>
+              <a:buNone/>
+            </a:pPr>
+            <a:r>
+              <a:rPr lang="en-US" sz="1800">
+                <a:latin typeface="Times New Roman"/>
+                <a:ea typeface="Times New Roman"/>
+                <a:cs typeface="Times New Roman"/>
+                <a:sym typeface="Times New Roman"/>
+              </a:rPr>
+              <a:t>	Design constraints	:   </a:t>
+            </a:r>
+            <a:r>
+              <a:rPr lang="en-US" sz="1800" b="1">
+                <a:latin typeface="Times New Roman"/>
+                <a:ea typeface="Times New Roman"/>
+                <a:cs typeface="Times New Roman"/>
+                <a:sym typeface="Times New Roman"/>
+              </a:rPr>
+              <a:t>Spyder</a:t>
+            </a:r>
+            <a:endParaRPr sz="1800" b="1">
+              <a:latin typeface="Times New Roman"/>
+              <a:ea typeface="Times New Roman"/>
+              <a:cs typeface="Times New Roman"/>
+              <a:sym typeface="Times New Roman"/>
+            </a:endParaRPr>
+          </a:p>
+          <a:p>
+            <a:pPr marL="0" lvl="0" indent="0" algn="l" rtl="0">
+              <a:lnSpc>
+                <a:spcPct val="150000"/>
+              </a:lnSpc>
+              <a:spcBef>
+                <a:spcPts val="1000"/>
+              </a:spcBef>
+              <a:spcAft>
+                <a:spcPts val="0"/>
+              </a:spcAft>
+              <a:buClr>
+                <a:schemeClr val="dk1"/>
+              </a:buClr>
+              <a:buSzPts val="2000"/>
+              <a:buNone/>
+            </a:pPr>
+            <a:r>
+              <a:rPr lang="en-US" sz="1800" b="1">
+                <a:latin typeface="Times New Roman"/>
+                <a:ea typeface="Times New Roman"/>
+                <a:cs typeface="Times New Roman"/>
+                <a:sym typeface="Times New Roman"/>
+              </a:rPr>
+              <a:t>Hardware Requirements:</a:t>
+            </a:r>
+            <a:endParaRPr sz="2400" b="1"/>
+          </a:p>
+          <a:p>
+            <a:pPr marL="0" lvl="0" indent="0" algn="l" rtl="0">
+              <a:lnSpc>
+                <a:spcPct val="150000"/>
+              </a:lnSpc>
+              <a:spcBef>
+                <a:spcPts val="1000"/>
+              </a:spcBef>
+              <a:spcAft>
+                <a:spcPts val="0"/>
+              </a:spcAft>
+              <a:buClr>
+                <a:schemeClr val="dk1"/>
+              </a:buClr>
+              <a:buSzPts val="2000"/>
+              <a:buNone/>
+            </a:pPr>
+            <a:r>
+              <a:rPr lang="en-US" sz="1800">
+                <a:latin typeface="Times New Roman"/>
+                <a:ea typeface="Times New Roman"/>
+                <a:cs typeface="Times New Roman"/>
+                <a:sym typeface="Times New Roman"/>
+              </a:rPr>
+              <a:t>	System Processors	:  </a:t>
+            </a:r>
+            <a:r>
+              <a:rPr lang="en-US" sz="1800" b="1">
+                <a:latin typeface="Times New Roman"/>
+                <a:ea typeface="Times New Roman"/>
+                <a:cs typeface="Times New Roman"/>
+                <a:sym typeface="Times New Roman"/>
+              </a:rPr>
+              <a:t>Intel i5</a:t>
+            </a:r>
+            <a:endParaRPr sz="1800" b="1">
+              <a:latin typeface="Times New Roman"/>
+              <a:ea typeface="Times New Roman"/>
+              <a:cs typeface="Times New Roman"/>
+              <a:sym typeface="Times New Roman"/>
+            </a:endParaRPr>
+          </a:p>
+          <a:p>
+            <a:pPr marL="0" lvl="0" indent="0" algn="l" rtl="0">
+              <a:lnSpc>
+                <a:spcPct val="150000"/>
+              </a:lnSpc>
+              <a:spcBef>
+                <a:spcPts val="1000"/>
+              </a:spcBef>
+              <a:spcAft>
+                <a:spcPts val="0"/>
+              </a:spcAft>
+              <a:buClr>
+                <a:schemeClr val="dk1"/>
+              </a:buClr>
+              <a:buSzPts val="2000"/>
+              <a:buNone/>
+            </a:pPr>
+            <a:r>
+              <a:rPr lang="en-US" sz="1800">
+                <a:latin typeface="Times New Roman"/>
+                <a:ea typeface="Times New Roman"/>
+                <a:cs typeface="Times New Roman"/>
+                <a:sym typeface="Times New Roman"/>
+              </a:rPr>
+              <a:t>	Speed		:  </a:t>
+            </a:r>
+            <a:r>
+              <a:rPr lang="en-US" sz="1800" b="1">
+                <a:latin typeface="Times New Roman"/>
+                <a:ea typeface="Times New Roman"/>
+                <a:cs typeface="Times New Roman"/>
+                <a:sym typeface="Times New Roman"/>
+              </a:rPr>
+              <a:t>2.4 GHz</a:t>
+            </a:r>
+            <a:endParaRPr sz="1800" b="1">
+              <a:latin typeface="Times New Roman"/>
+              <a:ea typeface="Times New Roman"/>
+              <a:cs typeface="Times New Roman"/>
+              <a:sym typeface="Times New Roman"/>
+            </a:endParaRPr>
+          </a:p>
+          <a:p>
+            <a:pPr marL="0" lvl="0" indent="0" algn="l" rtl="0">
+              <a:lnSpc>
+                <a:spcPct val="150000"/>
+              </a:lnSpc>
+              <a:spcBef>
+                <a:spcPts val="1000"/>
+              </a:spcBef>
+              <a:spcAft>
+                <a:spcPts val="0"/>
+              </a:spcAft>
+              <a:buClr>
+                <a:schemeClr val="dk1"/>
+              </a:buClr>
+              <a:buSzPts val="2000"/>
+              <a:buNone/>
+            </a:pPr>
+            <a:r>
+              <a:rPr lang="en-US" sz="1800">
+                <a:latin typeface="Times New Roman"/>
+                <a:ea typeface="Times New Roman"/>
+                <a:cs typeface="Times New Roman"/>
+                <a:sym typeface="Times New Roman"/>
+              </a:rPr>
+              <a:t>	Hard Disk        	:  </a:t>
+            </a:r>
+            <a:r>
+              <a:rPr lang="en-US" sz="1800" b="1">
+                <a:latin typeface="Times New Roman"/>
+                <a:ea typeface="Times New Roman"/>
+                <a:cs typeface="Times New Roman"/>
+                <a:sym typeface="Times New Roman"/>
+              </a:rPr>
+              <a:t>150 GB</a:t>
+            </a:r>
+            <a:endParaRPr sz="2400" b="1"/>
+          </a:p>
+          <a:p>
+            <a:pPr marL="0" lvl="0" indent="0" algn="l" rtl="0">
+              <a:lnSpc>
+                <a:spcPct val="150000"/>
+              </a:lnSpc>
+              <a:spcBef>
+                <a:spcPts val="1000"/>
+              </a:spcBef>
+              <a:spcAft>
+                <a:spcPts val="0"/>
+              </a:spcAft>
+              <a:buClr>
+                <a:schemeClr val="dk1"/>
+              </a:buClr>
+              <a:buSzPts val="2000"/>
+              <a:buNone/>
+            </a:pPr>
+            <a:r>
+              <a:rPr lang="en-US" sz="1800">
+                <a:latin typeface="Times New Roman"/>
+                <a:ea typeface="Times New Roman"/>
+                <a:cs typeface="Times New Roman"/>
+                <a:sym typeface="Times New Roman"/>
+              </a:rPr>
+              <a:t>	RAM 		:  </a:t>
+            </a:r>
+            <a:r>
+              <a:rPr lang="en-US" sz="1800" b="1">
+                <a:latin typeface="Times New Roman"/>
+                <a:ea typeface="Times New Roman"/>
+                <a:cs typeface="Times New Roman"/>
+                <a:sym typeface="Times New Roman"/>
+              </a:rPr>
+              <a:t>8 GB</a:t>
+            </a:r>
+            <a:endParaRPr sz="1800" b="1">
+              <a:latin typeface="Times New Roman"/>
+              <a:ea typeface="Times New Roman"/>
+              <a:cs typeface="Times New Roman"/>
+              <a:sym typeface="Times New Roman"/>
+            </a:endParaRPr>
+          </a:p>
+          <a:p>
+            <a:pPr marL="0" lvl="0" indent="0" algn="l" rtl="0">
+              <a:lnSpc>
+                <a:spcPct val="150000"/>
+              </a:lnSpc>
+              <a:spcBef>
+                <a:spcPts val="1000"/>
+              </a:spcBef>
+              <a:spcAft>
+                <a:spcPts val="0"/>
+              </a:spcAft>
+              <a:buClr>
+                <a:schemeClr val="dk1"/>
+              </a:buClr>
+              <a:buSzPts val="2000"/>
+              <a:buNone/>
+            </a:pPr>
+            <a:r>
+              <a:rPr lang="en-US" sz="1800">
+                <a:latin typeface="Times New Roman"/>
+                <a:ea typeface="Times New Roman"/>
+                <a:cs typeface="Times New Roman"/>
+                <a:sym typeface="Times New Roman"/>
+              </a:rPr>
+              <a:t>	Graphic Card	:  </a:t>
+            </a:r>
+            <a:r>
+              <a:rPr lang="en-US" sz="1800" b="1">
+                <a:latin typeface="Times New Roman"/>
+                <a:ea typeface="Times New Roman"/>
+                <a:cs typeface="Times New Roman"/>
+                <a:sym typeface="Times New Roman"/>
+              </a:rPr>
+              <a:t>2 GB</a:t>
+            </a:r>
+            <a:endParaRPr sz="2400" b="1"/>
+          </a:p>
+          <a:p>
+            <a:pPr marL="228600" lvl="0" indent="-158750" algn="l" rtl="0">
+              <a:lnSpc>
+                <a:spcPct val="150000"/>
+              </a:lnSpc>
+              <a:spcBef>
+                <a:spcPts val="1000"/>
+              </a:spcBef>
+              <a:spcAft>
+                <a:spcPts val="0"/>
+              </a:spcAft>
+              <a:buClr>
+                <a:schemeClr val="dk1"/>
+              </a:buClr>
+              <a:buSzPts val="1100"/>
+              <a:buNone/>
+            </a:pPr>
+            <a:endParaRPr sz="1050"/>
+          </a:p>
+        </p:txBody>
+      </p:sp>
+    </p:spTree>
+  </p:cSld>
+  <p:clrMapOvr>
+    <a:masterClrMapping/>
+  </p:clrMapOvr>
+  <p:transition spd="med">
+    <p:wipe/>
+  </p:transition>
+</p:sld>
+</file>
+
+<file path=ppt/slides/slide16.xml><?xml version="1.0" encoding="utf-8"?>
+<p:sld xmlns:a="http://schemas.openxmlformats.org/drawingml/2006/main" xmlns:r="http://schemas.openxmlformats.org/officeDocument/2006/relationships" xmlns:p="http://schemas.openxmlformats.org/presentationml/2006/main">
+  <p:cSld>
+    <p:spTree>
+      <p:nvGrpSpPr>
+        <p:cNvPr id="1" name="Shape 296"/>
+        <p:cNvGrpSpPr/>
+        <p:nvPr/>
+      </p:nvGrpSpPr>
+      <p:grpSpPr>
+        <a:xfrm>
+          <a:off x="0" y="0"/>
+          <a:ext cx="0" cy="0"/>
+          <a:chOff x="0" y="0"/>
+          <a:chExt cx="0" cy="0"/>
+        </a:xfrm>
+      </p:grpSpPr>
+      <p:sp>
+        <p:nvSpPr>
+          <p:cNvPr id="1048751" name="Google Shape;297;p21"/>
+          <p:cNvSpPr txBox="1">
+            <a:spLocks noGrp="1"/>
+          </p:cNvSpPr>
+          <p:nvPr>
+            <p:ph type="title"/>
+          </p:nvPr>
+        </p:nvSpPr>
+        <p:spPr>
+          <a:xfrm>
+            <a:off x="1764099" y="-3732"/>
+            <a:ext cx="10318425" cy="1026288"/>
+          </a:xfrm>
+          <a:prstGeom prst="rect">
+            <a:avLst/>
+          </a:prstGeom>
+          <a:noFill/>
+          <a:ln>
+            <a:noFill/>
+          </a:ln>
+        </p:spPr>
+        <p:txBody>
+          <a:bodyPr spcFirstLastPara="1" wrap="square" lIns="91425" tIns="45700" rIns="91425" bIns="45700" anchor="ctr" anchorCtr="0">
             <a:normAutofit/>
           </a:bodyPr>
           <a:lstStyle/>
@@ -20040,7 +21341,365 @@
 </p:sld>
 </file>
 
-<file path=ppt/slides/slide16.xml><?xml version="1.0" encoding="utf-8"?>
+<file path=ppt/slides/slide17.xml><?xml version="1.0" encoding="utf-8"?>
+<p:sld xmlns:a="http://schemas.openxmlformats.org/drawingml/2006/main" xmlns:r="http://schemas.openxmlformats.org/officeDocument/2006/relationships" xmlns:p="http://schemas.openxmlformats.org/presentationml/2006/main">
+  <p:cSld>
+    <p:spTree>
+      <p:nvGrpSpPr>
+        <p:cNvPr id="1" name="Shape 296"/>
+        <p:cNvGrpSpPr/>
+        <p:nvPr/>
+      </p:nvGrpSpPr>
+      <p:grpSpPr>
+        <a:xfrm>
+          <a:off x="0" y="0"/>
+          <a:ext cx="0" cy="0"/>
+          <a:chOff x="0" y="0"/>
+          <a:chExt cx="0" cy="0"/>
+        </a:xfrm>
+      </p:grpSpPr>
+      <p:sp>
+        <p:nvSpPr>
+          <p:cNvPr id="1048752" name="Google Shape;298;p21"/>
+          <p:cNvSpPr/>
+          <p:nvPr/>
+        </p:nvSpPr>
+        <p:spPr>
+          <a:xfrm>
+            <a:off x="1" y="0"/>
+            <a:ext cx="1764099" cy="1022556"/>
+          </a:xfrm>
+          <a:custGeom>
+            <a:avLst/>
+            <a:gdLst/>
+            <a:ahLst/>
+            <a:cxnLst/>
+            <a:rect l="l" t="t" r="r" b="b"/>
+            <a:pathLst>
+              <a:path w="1764099" h="1558212" extrusionOk="0">
+                <a:moveTo>
+                  <a:pt x="0" y="0"/>
+                </a:moveTo>
+                <a:lnTo>
+                  <a:pt x="1764099" y="0"/>
+                </a:lnTo>
+                <a:lnTo>
+                  <a:pt x="1042087" y="1558212"/>
+                </a:lnTo>
+                <a:lnTo>
+                  <a:pt x="0" y="1558212"/>
+                </a:lnTo>
+                <a:close/>
+              </a:path>
+            </a:pathLst>
+          </a:custGeom>
+          <a:solidFill>
+            <a:schemeClr val="accent4"/>
+          </a:solidFill>
+          <a:ln>
+            <a:noFill/>
+          </a:ln>
+        </p:spPr>
+        <p:txBody>
+          <a:bodyPr spcFirstLastPara="1" wrap="square" lIns="91425" tIns="45700" rIns="91425" bIns="45700" anchor="ctr" anchorCtr="0">
+            <a:noAutofit/>
+          </a:bodyPr>
+          <a:lstStyle/>
+          <a:p>
+            <a:pPr marL="0" marR="0" lvl="0" indent="0" algn="ctr" rtl="0">
+              <a:lnSpc>
+                <a:spcPct val="100000"/>
+              </a:lnSpc>
+              <a:spcBef>
+                <a:spcPts val="0"/>
+              </a:spcBef>
+              <a:spcAft>
+                <a:spcPts val="0"/>
+              </a:spcAft>
+              <a:buClr>
+                <a:srgbClr val="000000"/>
+              </a:buClr>
+              <a:buSzPts val="1800"/>
+              <a:buFont typeface="Arial"/>
+              <a:buNone/>
+            </a:pPr>
+            <a:endParaRPr sz="1800" b="0" i="0" u="none" strike="noStrike" cap="none">
+              <a:solidFill>
+                <a:schemeClr val="lt1"/>
+              </a:solidFill>
+              <a:latin typeface="Calibri"/>
+              <a:ea typeface="Calibri"/>
+              <a:cs typeface="Calibri"/>
+              <a:sym typeface="Calibri"/>
+            </a:endParaRPr>
+          </a:p>
+        </p:txBody>
+      </p:sp>
+      <p:sp>
+        <p:nvSpPr>
+          <p:cNvPr id="1048753" name="Google Shape;299;p21"/>
+          <p:cNvSpPr/>
+          <p:nvPr/>
+        </p:nvSpPr>
+        <p:spPr>
+          <a:xfrm>
+            <a:off x="1" y="0"/>
+            <a:ext cx="12191999" cy="6858000"/>
+          </a:xfrm>
+          <a:custGeom>
+            <a:avLst/>
+            <a:gdLst/>
+            <a:ahLst/>
+            <a:cxnLst/>
+            <a:rect l="l" t="t" r="r" b="b"/>
+            <a:pathLst>
+              <a:path w="12191999" h="5166360" extrusionOk="0">
+                <a:moveTo>
+                  <a:pt x="0" y="0"/>
+                </a:moveTo>
+                <a:lnTo>
+                  <a:pt x="1822388" y="0"/>
+                </a:lnTo>
+                <a:lnTo>
+                  <a:pt x="6468290" y="0"/>
+                </a:lnTo>
+                <a:lnTo>
+                  <a:pt x="7796394" y="0"/>
+                </a:lnTo>
+                <a:lnTo>
+                  <a:pt x="8376834" y="0"/>
+                </a:lnTo>
+                <a:lnTo>
+                  <a:pt x="9704938" y="0"/>
+                </a:lnTo>
+                <a:lnTo>
+                  <a:pt x="9704938" y="2"/>
+                </a:lnTo>
+                <a:lnTo>
+                  <a:pt x="10283456" y="2"/>
+                </a:lnTo>
+                <a:lnTo>
+                  <a:pt x="10863897" y="2"/>
+                </a:lnTo>
+                <a:lnTo>
+                  <a:pt x="12191999" y="2"/>
+                </a:lnTo>
+                <a:lnTo>
+                  <a:pt x="12191999" y="5166360"/>
+                </a:lnTo>
+                <a:lnTo>
+                  <a:pt x="0" y="5166360"/>
+                </a:lnTo>
+                <a:lnTo>
+                  <a:pt x="0" y="2604436"/>
+                </a:lnTo>
+                <a:lnTo>
+                  <a:pt x="862341" y="743371"/>
+                </a:lnTo>
+                <a:lnTo>
+                  <a:pt x="0" y="743371"/>
+                </a:lnTo>
+                <a:lnTo>
+                  <a:pt x="0" y="742508"/>
+                </a:lnTo>
+                <a:lnTo>
+                  <a:pt x="92826" y="742508"/>
+                </a:lnTo>
+                <a:lnTo>
+                  <a:pt x="406486" y="742508"/>
+                </a:lnTo>
+                <a:lnTo>
+                  <a:pt x="406486" y="742507"/>
+                </a:lnTo>
+                <a:lnTo>
+                  <a:pt x="862741" y="742507"/>
+                </a:lnTo>
+                <a:lnTo>
+                  <a:pt x="1206388" y="864"/>
+                </a:lnTo>
+                <a:lnTo>
+                  <a:pt x="748500" y="864"/>
+                </a:lnTo>
+                <a:lnTo>
+                  <a:pt x="0" y="864"/>
+                </a:lnTo>
+                <a:close/>
+              </a:path>
+            </a:pathLst>
+          </a:custGeom>
+          <a:solidFill>
+            <a:srgbClr val="A6A6A6">
+              <a:alpha val="49411"/>
+            </a:srgbClr>
+          </a:solidFill>
+          <a:ln>
+            <a:noFill/>
+          </a:ln>
+        </p:spPr>
+        <p:txBody>
+          <a:bodyPr spcFirstLastPara="1" wrap="square" lIns="91425" tIns="45700" rIns="91425" bIns="45700" anchor="ctr" anchorCtr="0">
+            <a:noAutofit/>
+          </a:bodyPr>
+          <a:lstStyle/>
+          <a:p>
+            <a:pPr marL="0" marR="0" lvl="0" indent="0" algn="ctr" rtl="0">
+              <a:lnSpc>
+                <a:spcPct val="100000"/>
+              </a:lnSpc>
+              <a:spcBef>
+                <a:spcPts val="0"/>
+              </a:spcBef>
+              <a:spcAft>
+                <a:spcPts val="0"/>
+              </a:spcAft>
+              <a:buClr>
+                <a:srgbClr val="000000"/>
+              </a:buClr>
+              <a:buSzPts val="1800"/>
+              <a:buFont typeface="Arial"/>
+              <a:buNone/>
+            </a:pPr>
+            <a:endParaRPr sz="1800" b="0" i="0" u="none" strike="noStrike" cap="none" dirty="0">
+              <a:solidFill>
+                <a:schemeClr val="lt1"/>
+              </a:solidFill>
+              <a:latin typeface="Calibri"/>
+              <a:ea typeface="Calibri"/>
+              <a:cs typeface="Calibri"/>
+              <a:sym typeface="Calibri"/>
+            </a:endParaRPr>
+          </a:p>
+        </p:txBody>
+      </p:sp>
+      <p:sp>
+        <p:nvSpPr>
+          <p:cNvPr id="1048754" name="Google Shape;300;p21"/>
+          <p:cNvSpPr/>
+          <p:nvPr/>
+        </p:nvSpPr>
+        <p:spPr>
+          <a:xfrm>
+            <a:off x="0" y="1190196"/>
+            <a:ext cx="971654" cy="2096979"/>
+          </a:xfrm>
+          <a:custGeom>
+            <a:avLst/>
+            <a:gdLst/>
+            <a:ahLst/>
+            <a:cxnLst/>
+            <a:rect l="l" t="t" r="r" b="b"/>
+            <a:pathLst>
+              <a:path w="971654" h="2096979" extrusionOk="0">
+                <a:moveTo>
+                  <a:pt x="0" y="0"/>
+                </a:moveTo>
+                <a:lnTo>
+                  <a:pt x="971654" y="0"/>
+                </a:lnTo>
+                <a:lnTo>
+                  <a:pt x="0" y="2096979"/>
+                </a:lnTo>
+                <a:close/>
+              </a:path>
+            </a:pathLst>
+          </a:custGeom>
+          <a:solidFill>
+            <a:srgbClr val="404040"/>
+          </a:solidFill>
+          <a:ln>
+            <a:noFill/>
+          </a:ln>
+        </p:spPr>
+        <p:txBody>
+          <a:bodyPr spcFirstLastPara="1" wrap="square" lIns="91425" tIns="45700" rIns="91425" bIns="45700" anchor="ctr" anchorCtr="0">
+            <a:noAutofit/>
+          </a:bodyPr>
+          <a:lstStyle/>
+          <a:p>
+            <a:pPr marL="0" marR="0" lvl="0" indent="0" algn="ctr" rtl="0">
+              <a:lnSpc>
+                <a:spcPct val="100000"/>
+              </a:lnSpc>
+              <a:spcBef>
+                <a:spcPts val="0"/>
+              </a:spcBef>
+              <a:spcAft>
+                <a:spcPts val="0"/>
+              </a:spcAft>
+              <a:buClr>
+                <a:srgbClr val="000000"/>
+              </a:buClr>
+              <a:buSzPts val="1800"/>
+              <a:buFont typeface="Arial"/>
+              <a:buNone/>
+            </a:pPr>
+            <a:endParaRPr sz="1800" b="0" i="0" u="none" strike="noStrike" cap="none">
+              <a:solidFill>
+                <a:schemeClr val="lt1"/>
+              </a:solidFill>
+              <a:latin typeface="Calibri"/>
+              <a:ea typeface="Calibri"/>
+              <a:cs typeface="Calibri"/>
+              <a:sym typeface="Calibri"/>
+            </a:endParaRPr>
+          </a:p>
+        </p:txBody>
+      </p:sp>
+      <p:sp>
+        <p:nvSpPr>
+          <p:cNvPr id="3" name="Text Placeholder 2">
+            <a:extLst>
+              <a:ext uri="{FF2B5EF4-FFF2-40B4-BE49-F238E27FC236}">
+                <a16:creationId xmlns:a16="http://schemas.microsoft.com/office/drawing/2014/main" id="{2FA7DB88-BEE3-476D-AB66-74A33045F395}"/>
+              </a:ext>
+            </a:extLst>
+          </p:cNvPr>
+          <p:cNvSpPr>
+            <a:spLocks noGrp="1"/>
+          </p:cNvSpPr>
+          <p:nvPr>
+            <p:ph type="body" idx="1"/>
+          </p:nvPr>
+        </p:nvSpPr>
+        <p:spPr>
+          <a:xfrm>
+            <a:off x="0" y="0"/>
+            <a:ext cx="12192000" cy="6858000"/>
+          </a:xfrm>
+        </p:spPr>
+        <p:txBody>
+          <a:bodyPr anchor="ctr">
+            <a:normAutofit/>
+          </a:bodyPr>
+          <a:lstStyle/>
+          <a:p>
+            <a:pPr marL="114300" indent="0" algn="ctr">
+              <a:buNone/>
+            </a:pPr>
+            <a:r>
+              <a:rPr lang="en-IN" sz="4000" b="1" dirty="0"/>
+              <a:t>CODE EXPLAINATION</a:t>
+            </a:r>
+          </a:p>
+        </p:txBody>
+      </p:sp>
+    </p:spTree>
+    <p:extLst>
+      <p:ext uri="{BB962C8B-B14F-4D97-AF65-F5344CB8AC3E}">
+        <p14:creationId xmlns:p14="http://schemas.microsoft.com/office/powerpoint/2010/main" val="1936583860"/>
+      </p:ext>
+    </p:extLst>
+  </p:cSld>
+  <p:clrMapOvr>
+    <a:masterClrMapping/>
+  </p:clrMapOvr>
+  <p:transition spd="med">
+    <p:wipe/>
+  </p:transition>
+</p:sld>
+</file>
+
+<file path=ppt/slides/slide18.xml><?xml version="1.0" encoding="utf-8"?>
 <p:sld xmlns:a="http://schemas.openxmlformats.org/drawingml/2006/main" xmlns:r="http://schemas.openxmlformats.org/officeDocument/2006/relationships" xmlns:p="http://schemas.openxmlformats.org/presentationml/2006/main">
   <p:cSld>
     <p:spTree>
@@ -20528,7 +22187,7 @@
 </p:sld>
 </file>
 
-<file path=ppt/slides/slide17.xml><?xml version="1.0" encoding="utf-8"?>
+<file path=ppt/slides/slide19.xml><?xml version="1.0" encoding="utf-8"?>
 <p:sld xmlns:a="http://schemas.openxmlformats.org/drawingml/2006/main" xmlns:r="http://schemas.openxmlformats.org/officeDocument/2006/relationships" xmlns:p="http://schemas.openxmlformats.org/presentationml/2006/main">
   <p:cSld>
     <p:spTree>
@@ -21061,7 +22720,1092 @@
 </p:sld>
 </file>
 
-<file path=ppt/slides/slide18.xml><?xml version="1.0" encoding="utf-8"?>
+<file path=ppt/slides/slide2.xml><?xml version="1.0" encoding="utf-8"?>
+<p:sld xmlns:a="http://schemas.openxmlformats.org/drawingml/2006/main" xmlns:r="http://schemas.openxmlformats.org/officeDocument/2006/relationships" xmlns:p="http://schemas.openxmlformats.org/presentationml/2006/main">
+  <p:cSld>
+    <p:spTree>
+      <p:nvGrpSpPr>
+        <p:cNvPr id="1" name="Shape 101"/>
+        <p:cNvGrpSpPr/>
+        <p:nvPr/>
+      </p:nvGrpSpPr>
+      <p:grpSpPr>
+        <a:xfrm>
+          <a:off x="0" y="0"/>
+          <a:ext cx="0" cy="0"/>
+          <a:chOff x="0" y="0"/>
+          <a:chExt cx="0" cy="0"/>
+        </a:xfrm>
+      </p:grpSpPr>
+      <p:sp>
+        <p:nvSpPr>
+          <p:cNvPr id="1048662" name="Google Shape;102;p2"/>
+          <p:cNvSpPr txBox="1">
+            <a:spLocks noGrp="1"/>
+          </p:cNvSpPr>
+          <p:nvPr>
+            <p:ph type="title"/>
+          </p:nvPr>
+        </p:nvSpPr>
+        <p:spPr>
+          <a:xfrm>
+            <a:off x="1764099" y="-3732"/>
+            <a:ext cx="10318425" cy="1026288"/>
+          </a:xfrm>
+          <a:prstGeom prst="rect">
+            <a:avLst/>
+          </a:prstGeom>
+          <a:noFill/>
+          <a:ln>
+            <a:noFill/>
+          </a:ln>
+        </p:spPr>
+        <p:txBody>
+          <a:bodyPr spcFirstLastPara="1" wrap="square" lIns="91425" tIns="45700" rIns="91425" bIns="45700" anchor="ctr" anchorCtr="0">
+            <a:normAutofit/>
+          </a:bodyPr>
+          <a:lstStyle/>
+          <a:p>
+            <a:pPr marL="0" lvl="0" indent="0" algn="l" rtl="0">
+              <a:lnSpc>
+                <a:spcPct val="90000"/>
+              </a:lnSpc>
+              <a:spcBef>
+                <a:spcPts val="0"/>
+              </a:spcBef>
+              <a:spcAft>
+                <a:spcPts val="0"/>
+              </a:spcAft>
+              <a:buClr>
+                <a:schemeClr val="dk1"/>
+              </a:buClr>
+              <a:buSzPts val="4400"/>
+              <a:buFont typeface="Calibri"/>
+              <a:buNone/>
+            </a:pPr>
+            <a:r>
+              <a:rPr lang="en-US" b="1"/>
+              <a:t>INTRODUCTION</a:t>
+            </a:r>
+          </a:p>
+        </p:txBody>
+      </p:sp>
+      <p:sp>
+        <p:nvSpPr>
+          <p:cNvPr id="1048663" name="Google Shape;103;p2"/>
+          <p:cNvSpPr/>
+          <p:nvPr/>
+        </p:nvSpPr>
+        <p:spPr>
+          <a:xfrm>
+            <a:off x="1" y="0"/>
+            <a:ext cx="1764099" cy="1022556"/>
+          </a:xfrm>
+          <a:custGeom>
+            <a:avLst/>
+            <a:gdLst/>
+            <a:ahLst/>
+            <a:cxnLst/>
+            <a:rect l="l" t="t" r="r" b="b"/>
+            <a:pathLst>
+              <a:path w="1764099" h="1558212" extrusionOk="0">
+                <a:moveTo>
+                  <a:pt x="0" y="0"/>
+                </a:moveTo>
+                <a:lnTo>
+                  <a:pt x="1764099" y="0"/>
+                </a:lnTo>
+                <a:lnTo>
+                  <a:pt x="1042087" y="1558212"/>
+                </a:lnTo>
+                <a:lnTo>
+                  <a:pt x="0" y="1558212"/>
+                </a:lnTo>
+                <a:close/>
+              </a:path>
+            </a:pathLst>
+          </a:custGeom>
+          <a:solidFill>
+            <a:schemeClr val="accent4"/>
+          </a:solidFill>
+          <a:ln>
+            <a:noFill/>
+          </a:ln>
+        </p:spPr>
+        <p:txBody>
+          <a:bodyPr spcFirstLastPara="1" wrap="square" lIns="91425" tIns="45700" rIns="91425" bIns="45700" anchor="ctr" anchorCtr="0">
+            <a:noAutofit/>
+          </a:bodyPr>
+          <a:lstStyle/>
+          <a:p>
+            <a:pPr marL="0" marR="0" lvl="0" indent="0" algn="ctr" rtl="0">
+              <a:lnSpc>
+                <a:spcPct val="100000"/>
+              </a:lnSpc>
+              <a:spcBef>
+                <a:spcPts val="0"/>
+              </a:spcBef>
+              <a:spcAft>
+                <a:spcPts val="0"/>
+              </a:spcAft>
+              <a:buClr>
+                <a:srgbClr val="000000"/>
+              </a:buClr>
+              <a:buSzPts val="1800"/>
+              <a:buFont typeface="Arial"/>
+              <a:buNone/>
+            </a:pPr>
+            <a:endParaRPr sz="1800" b="0" i="0" u="none" strike="noStrike" cap="none">
+              <a:solidFill>
+                <a:schemeClr val="lt1"/>
+              </a:solidFill>
+              <a:latin typeface="Calibri"/>
+              <a:ea typeface="Calibri"/>
+              <a:cs typeface="Calibri"/>
+              <a:sym typeface="Calibri"/>
+            </a:endParaRPr>
+          </a:p>
+        </p:txBody>
+      </p:sp>
+      <p:sp>
+        <p:nvSpPr>
+          <p:cNvPr id="1048664" name="Google Shape;104;p2"/>
+          <p:cNvSpPr/>
+          <p:nvPr/>
+        </p:nvSpPr>
+        <p:spPr>
+          <a:xfrm>
+            <a:off x="1" y="1190196"/>
+            <a:ext cx="12191999" cy="5667804"/>
+          </a:xfrm>
+          <a:custGeom>
+            <a:avLst/>
+            <a:gdLst/>
+            <a:ahLst/>
+            <a:cxnLst/>
+            <a:rect l="l" t="t" r="r" b="b"/>
+            <a:pathLst>
+              <a:path w="12191999" h="5166360" extrusionOk="0">
+                <a:moveTo>
+                  <a:pt x="0" y="0"/>
+                </a:moveTo>
+                <a:lnTo>
+                  <a:pt x="1822388" y="0"/>
+                </a:lnTo>
+                <a:lnTo>
+                  <a:pt x="6468290" y="0"/>
+                </a:lnTo>
+                <a:lnTo>
+                  <a:pt x="7796394" y="0"/>
+                </a:lnTo>
+                <a:lnTo>
+                  <a:pt x="8376834" y="0"/>
+                </a:lnTo>
+                <a:lnTo>
+                  <a:pt x="9704938" y="0"/>
+                </a:lnTo>
+                <a:lnTo>
+                  <a:pt x="9704938" y="2"/>
+                </a:lnTo>
+                <a:lnTo>
+                  <a:pt x="10283456" y="2"/>
+                </a:lnTo>
+                <a:lnTo>
+                  <a:pt x="10863897" y="2"/>
+                </a:lnTo>
+                <a:lnTo>
+                  <a:pt x="12191999" y="2"/>
+                </a:lnTo>
+                <a:lnTo>
+                  <a:pt x="12191999" y="5166360"/>
+                </a:lnTo>
+                <a:lnTo>
+                  <a:pt x="0" y="5166360"/>
+                </a:lnTo>
+                <a:lnTo>
+                  <a:pt x="0" y="2604436"/>
+                </a:lnTo>
+                <a:lnTo>
+                  <a:pt x="862341" y="743371"/>
+                </a:lnTo>
+                <a:lnTo>
+                  <a:pt x="0" y="743371"/>
+                </a:lnTo>
+                <a:lnTo>
+                  <a:pt x="0" y="742508"/>
+                </a:lnTo>
+                <a:lnTo>
+                  <a:pt x="92826" y="742508"/>
+                </a:lnTo>
+                <a:lnTo>
+                  <a:pt x="406486" y="742508"/>
+                </a:lnTo>
+                <a:lnTo>
+                  <a:pt x="406486" y="742507"/>
+                </a:lnTo>
+                <a:lnTo>
+                  <a:pt x="862741" y="742507"/>
+                </a:lnTo>
+                <a:lnTo>
+                  <a:pt x="1206388" y="864"/>
+                </a:lnTo>
+                <a:lnTo>
+                  <a:pt x="748500" y="864"/>
+                </a:lnTo>
+                <a:lnTo>
+                  <a:pt x="0" y="864"/>
+                </a:lnTo>
+                <a:close/>
+              </a:path>
+            </a:pathLst>
+          </a:custGeom>
+          <a:solidFill>
+            <a:srgbClr val="A6A6A6">
+              <a:alpha val="49411"/>
+            </a:srgbClr>
+          </a:solidFill>
+          <a:ln>
+            <a:noFill/>
+          </a:ln>
+        </p:spPr>
+        <p:txBody>
+          <a:bodyPr spcFirstLastPara="1" wrap="square" lIns="91425" tIns="45700" rIns="91425" bIns="45700" anchor="ctr" anchorCtr="0">
+            <a:noAutofit/>
+          </a:bodyPr>
+          <a:lstStyle/>
+          <a:p>
+            <a:pPr marL="0" marR="0" lvl="0" indent="0" algn="ctr" rtl="0">
+              <a:lnSpc>
+                <a:spcPct val="100000"/>
+              </a:lnSpc>
+              <a:spcBef>
+                <a:spcPts val="0"/>
+              </a:spcBef>
+              <a:spcAft>
+                <a:spcPts val="0"/>
+              </a:spcAft>
+              <a:buClr>
+                <a:srgbClr val="000000"/>
+              </a:buClr>
+              <a:buSzPts val="1800"/>
+              <a:buFont typeface="Arial"/>
+              <a:buNone/>
+            </a:pPr>
+            <a:endParaRPr sz="1800" b="0" i="0" u="none" strike="noStrike" cap="none">
+              <a:solidFill>
+                <a:schemeClr val="lt1"/>
+              </a:solidFill>
+              <a:latin typeface="Calibri"/>
+              <a:ea typeface="Calibri"/>
+              <a:cs typeface="Calibri"/>
+              <a:sym typeface="Calibri"/>
+            </a:endParaRPr>
+          </a:p>
+        </p:txBody>
+      </p:sp>
+      <p:sp>
+        <p:nvSpPr>
+          <p:cNvPr id="1048665" name="Google Shape;105;p2"/>
+          <p:cNvSpPr/>
+          <p:nvPr/>
+        </p:nvSpPr>
+        <p:spPr>
+          <a:xfrm>
+            <a:off x="0" y="1190196"/>
+            <a:ext cx="971654" cy="2096979"/>
+          </a:xfrm>
+          <a:custGeom>
+            <a:avLst/>
+            <a:gdLst/>
+            <a:ahLst/>
+            <a:cxnLst/>
+            <a:rect l="l" t="t" r="r" b="b"/>
+            <a:pathLst>
+              <a:path w="971654" h="2096979" extrusionOk="0">
+                <a:moveTo>
+                  <a:pt x="0" y="0"/>
+                </a:moveTo>
+                <a:lnTo>
+                  <a:pt x="971654" y="0"/>
+                </a:lnTo>
+                <a:lnTo>
+                  <a:pt x="0" y="2096979"/>
+                </a:lnTo>
+                <a:close/>
+              </a:path>
+            </a:pathLst>
+          </a:custGeom>
+          <a:solidFill>
+            <a:srgbClr val="404040"/>
+          </a:solidFill>
+          <a:ln>
+            <a:noFill/>
+          </a:ln>
+        </p:spPr>
+        <p:txBody>
+          <a:bodyPr spcFirstLastPara="1" wrap="square" lIns="91425" tIns="45700" rIns="91425" bIns="45700" anchor="ctr" anchorCtr="0">
+            <a:noAutofit/>
+          </a:bodyPr>
+          <a:lstStyle/>
+          <a:p>
+            <a:pPr marL="0" marR="0" lvl="0" indent="0" algn="ctr" rtl="0">
+              <a:lnSpc>
+                <a:spcPct val="100000"/>
+              </a:lnSpc>
+              <a:spcBef>
+                <a:spcPts val="0"/>
+              </a:spcBef>
+              <a:spcAft>
+                <a:spcPts val="0"/>
+              </a:spcAft>
+              <a:buClr>
+                <a:srgbClr val="000000"/>
+              </a:buClr>
+              <a:buSzPts val="1800"/>
+              <a:buFont typeface="Arial"/>
+              <a:buNone/>
+            </a:pPr>
+            <a:endParaRPr sz="1800" b="0" i="0" u="none" strike="noStrike" cap="none">
+              <a:solidFill>
+                <a:schemeClr val="lt1"/>
+              </a:solidFill>
+              <a:latin typeface="Calibri"/>
+              <a:ea typeface="Calibri"/>
+              <a:cs typeface="Calibri"/>
+              <a:sym typeface="Calibri"/>
+            </a:endParaRPr>
+          </a:p>
+        </p:txBody>
+      </p:sp>
+      <p:sp>
+        <p:nvSpPr>
+          <p:cNvPr id="1048666" name="Google Shape;106;p2"/>
+          <p:cNvSpPr txBox="1">
+            <a:spLocks noGrp="1"/>
+          </p:cNvSpPr>
+          <p:nvPr>
+            <p:ph type="body" idx="1"/>
+          </p:nvPr>
+        </p:nvSpPr>
+        <p:spPr>
+          <a:xfrm>
+            <a:off x="1219200" y="1406012"/>
+            <a:ext cx="10785987" cy="1117252"/>
+          </a:xfrm>
+          <a:prstGeom prst="rect">
+            <a:avLst/>
+          </a:prstGeom>
+          <a:noFill/>
+          <a:ln>
+            <a:noFill/>
+          </a:ln>
+        </p:spPr>
+        <p:txBody>
+          <a:bodyPr spcFirstLastPara="1" wrap="square" lIns="91425" tIns="45700" rIns="91425" bIns="45700" anchor="t" anchorCtr="0">
+            <a:normAutofit/>
+          </a:bodyPr>
+          <a:lstStyle/>
+          <a:p>
+            <a:pPr marL="228600" lvl="0" indent="-228600" algn="just" rtl="0">
+              <a:lnSpc>
+                <a:spcPct val="100000"/>
+              </a:lnSpc>
+              <a:spcBef>
+                <a:spcPts val="0"/>
+              </a:spcBef>
+              <a:spcAft>
+                <a:spcPts val="0"/>
+              </a:spcAft>
+              <a:buClr>
+                <a:schemeClr val="dk1"/>
+              </a:buClr>
+              <a:buSzPts val="2200"/>
+              <a:buChar char="•"/>
+            </a:pPr>
+            <a:r>
+              <a:rPr lang="en-US" sz="2000">
+                <a:latin typeface="Times New Roman"/>
+                <a:ea typeface="Times New Roman"/>
+                <a:cs typeface="Times New Roman"/>
+                <a:sym typeface="Times New Roman"/>
+              </a:rPr>
+              <a:t>There are people who are facing illnesses such as deafness or dumbness. </a:t>
+            </a:r>
+            <a:r>
+              <a:rPr lang="en-US" sz="2000" b="1">
+                <a:latin typeface="Times New Roman"/>
+                <a:ea typeface="Times New Roman"/>
+                <a:cs typeface="Times New Roman"/>
+                <a:sym typeface="Times New Roman"/>
+              </a:rPr>
+              <a:t>They face difficulty interacting with others</a:t>
+            </a:r>
+            <a:r>
+              <a:rPr lang="en-US" sz="2000">
+                <a:latin typeface="Times New Roman"/>
+                <a:ea typeface="Times New Roman"/>
+                <a:cs typeface="Times New Roman"/>
+                <a:sym typeface="Times New Roman"/>
+              </a:rPr>
+              <a:t>. Previously developed techniques are all sensors based and they didn’t give the general solution. </a:t>
+            </a:r>
+            <a:endParaRPr sz="2000">
+              <a:latin typeface="Times New Roman"/>
+              <a:ea typeface="Times New Roman"/>
+              <a:cs typeface="Times New Roman"/>
+              <a:sym typeface="Times New Roman"/>
+            </a:endParaRPr>
+          </a:p>
+        </p:txBody>
+      </p:sp>
+      <p:pic>
+        <p:nvPicPr>
+          <p:cNvPr id="2097156" name="Google Shape;107;p2"/>
+          <p:cNvPicPr preferRelativeResize="0">
+            <a:picLocks/>
+          </p:cNvPicPr>
+          <p:nvPr/>
+        </p:nvPicPr>
+        <p:blipFill rotWithShape="1">
+          <a:blip r:embed="rId3">
+            <a:alphaModFix/>
+          </a:blip>
+          <a:srcRect/>
+          <a:stretch>
+            <a:fillRect/>
+          </a:stretch>
+        </p:blipFill>
+        <p:spPr>
+          <a:xfrm>
+            <a:off x="8288326" y="2556392"/>
+            <a:ext cx="3636883" cy="3655616"/>
+          </a:xfrm>
+          <a:prstGeom prst="rect">
+            <a:avLst/>
+          </a:prstGeom>
+          <a:noFill/>
+          <a:ln>
+            <a:noFill/>
+          </a:ln>
+        </p:spPr>
+      </p:pic>
+      <p:sp>
+        <p:nvSpPr>
+          <p:cNvPr id="1048667" name="Google Shape;108;p2"/>
+          <p:cNvSpPr txBox="1"/>
+          <p:nvPr/>
+        </p:nvSpPr>
+        <p:spPr>
+          <a:xfrm>
+            <a:off x="1219200" y="2438399"/>
+            <a:ext cx="6870741" cy="4168877"/>
+          </a:xfrm>
+          <a:prstGeom prst="rect">
+            <a:avLst/>
+          </a:prstGeom>
+          <a:noFill/>
+          <a:ln>
+            <a:noFill/>
+          </a:ln>
+        </p:spPr>
+        <p:txBody>
+          <a:bodyPr spcFirstLastPara="1" wrap="square" lIns="91425" tIns="45700" rIns="91425" bIns="45700" anchor="t" anchorCtr="0">
+            <a:normAutofit fontScale="87955"/>
+          </a:bodyPr>
+          <a:lstStyle/>
+          <a:p>
+            <a:pPr marL="228600" marR="0" lvl="0" indent="-228600" algn="just" rtl="0">
+              <a:lnSpc>
+                <a:spcPct val="110000"/>
+              </a:lnSpc>
+              <a:spcBef>
+                <a:spcPts val="1000"/>
+              </a:spcBef>
+              <a:spcAft>
+                <a:spcPts val="0"/>
+              </a:spcAft>
+              <a:buClr>
+                <a:schemeClr val="dk1"/>
+              </a:buClr>
+              <a:buSzPct val="108108"/>
+              <a:buFont typeface="Arial"/>
+              <a:buChar char="•"/>
+            </a:pPr>
+            <a:r>
+              <a:rPr lang="en-US" sz="2200" b="0" i="0" u="none" strike="noStrike" cap="none">
+                <a:solidFill>
+                  <a:schemeClr val="dk1"/>
+                </a:solidFill>
+                <a:latin typeface="Times New Roman"/>
+                <a:ea typeface="Times New Roman"/>
+                <a:cs typeface="Times New Roman"/>
+                <a:sym typeface="Times New Roman"/>
+              </a:rPr>
+              <a:t>This presentation explains a new technique of </a:t>
+            </a:r>
+            <a:r>
+              <a:rPr lang="en-US" sz="2200" b="1" i="0" u="none" strike="noStrike" cap="none">
+                <a:solidFill>
+                  <a:schemeClr val="dk1"/>
+                </a:solidFill>
+                <a:latin typeface="Times New Roman"/>
+                <a:ea typeface="Times New Roman"/>
+                <a:cs typeface="Times New Roman"/>
+                <a:sym typeface="Times New Roman"/>
+              </a:rPr>
+              <a:t>virtual talking without sensors</a:t>
+            </a:r>
+            <a:r>
+              <a:rPr lang="en-US" sz="2200" b="0" i="0" u="none" strike="noStrike" cap="none">
+                <a:solidFill>
+                  <a:schemeClr val="dk1"/>
+                </a:solidFill>
+                <a:latin typeface="Times New Roman"/>
+                <a:ea typeface="Times New Roman"/>
+                <a:cs typeface="Times New Roman"/>
+                <a:sym typeface="Times New Roman"/>
+              </a:rPr>
+              <a:t>. Convolutional Neural Network has been used to train the System. Web Camera is used to take the image of different gestures and that will be used as input to the </a:t>
+            </a:r>
+            <a:r>
+              <a:rPr lang="en-US" sz="2200" b="1" i="0" u="none" strike="noStrike" cap="none">
+                <a:solidFill>
+                  <a:schemeClr val="dk1"/>
+                </a:solidFill>
+                <a:latin typeface="Times New Roman"/>
+                <a:ea typeface="Times New Roman"/>
+                <a:cs typeface="Times New Roman"/>
+                <a:sym typeface="Times New Roman"/>
+              </a:rPr>
+              <a:t>MATLAB</a:t>
+            </a:r>
+            <a:r>
+              <a:rPr lang="en-US" sz="2200" b="0" i="0" u="none" strike="noStrike" cap="none">
+                <a:solidFill>
+                  <a:schemeClr val="dk1"/>
+                </a:solidFill>
+                <a:latin typeface="Times New Roman"/>
+                <a:ea typeface="Times New Roman"/>
+                <a:cs typeface="Times New Roman"/>
+                <a:sym typeface="Times New Roman"/>
+              </a:rPr>
+              <a:t>. </a:t>
+            </a:r>
+          </a:p>
+          <a:p>
+            <a:pPr marL="228600" marR="0" lvl="0" indent="-228600" algn="just" rtl="0">
+              <a:lnSpc>
+                <a:spcPct val="110000"/>
+              </a:lnSpc>
+              <a:spcBef>
+                <a:spcPts val="1000"/>
+              </a:spcBef>
+              <a:spcAft>
+                <a:spcPts val="0"/>
+              </a:spcAft>
+              <a:buClr>
+                <a:schemeClr val="dk1"/>
+              </a:buClr>
+              <a:buSzPct val="108108"/>
+              <a:buFont typeface="Arial"/>
+              <a:buChar char="•"/>
+            </a:pPr>
+            <a:r>
+              <a:rPr lang="en-US" sz="2200" b="0" i="0" u="none" strike="noStrike" cap="none">
+                <a:solidFill>
+                  <a:schemeClr val="dk1"/>
+                </a:solidFill>
+                <a:latin typeface="Times New Roman"/>
+                <a:ea typeface="Times New Roman"/>
+                <a:cs typeface="Times New Roman"/>
+                <a:sym typeface="Times New Roman"/>
+              </a:rPr>
+              <a:t>The </a:t>
+            </a:r>
+            <a:r>
+              <a:rPr lang="en-US" sz="2200" b="1" i="0" u="none" strike="noStrike" cap="none">
+                <a:solidFill>
+                  <a:schemeClr val="dk1"/>
+                </a:solidFill>
+                <a:latin typeface="Times New Roman"/>
+                <a:ea typeface="Times New Roman"/>
+                <a:cs typeface="Times New Roman"/>
+                <a:sym typeface="Times New Roman"/>
+              </a:rPr>
+              <a:t>software will recognize the image </a:t>
+            </a:r>
+            <a:r>
+              <a:rPr lang="en-US" sz="2200" b="0" i="0" u="none" strike="noStrike" cap="none">
+                <a:solidFill>
+                  <a:schemeClr val="dk1"/>
+                </a:solidFill>
+                <a:latin typeface="Times New Roman"/>
+                <a:ea typeface="Times New Roman"/>
+                <a:cs typeface="Times New Roman"/>
+                <a:sym typeface="Times New Roman"/>
+              </a:rPr>
+              <a:t>and identify the cores sign language and convert them to English language and give voice output using a voice replay kit.</a:t>
+            </a:r>
+          </a:p>
+          <a:p>
+            <a:pPr marL="228600" marR="0" lvl="0" indent="-228600" algn="just" rtl="0">
+              <a:lnSpc>
+                <a:spcPct val="110000"/>
+              </a:lnSpc>
+              <a:spcBef>
+                <a:spcPts val="1000"/>
+              </a:spcBef>
+              <a:spcAft>
+                <a:spcPts val="0"/>
+              </a:spcAft>
+              <a:buClr>
+                <a:schemeClr val="dk1"/>
+              </a:buClr>
+              <a:buSzPct val="108108"/>
+              <a:buFont typeface="Arial"/>
+              <a:buChar char="•"/>
+            </a:pPr>
+            <a:r>
+              <a:rPr lang="en-US" sz="2200" b="0" i="0" u="none" strike="noStrike" cap="none">
+                <a:solidFill>
+                  <a:schemeClr val="dk1"/>
+                </a:solidFill>
+                <a:latin typeface="Times New Roman"/>
+                <a:ea typeface="Times New Roman"/>
+                <a:cs typeface="Times New Roman"/>
+                <a:sym typeface="Times New Roman"/>
+              </a:rPr>
+              <a:t>Such as two-way communications between the dumb and normal people would be capable by converting the sign language to text and voice for various uses such as on video conference.</a:t>
+            </a:r>
+          </a:p>
+        </p:txBody>
+      </p:sp>
+    </p:spTree>
+  </p:cSld>
+  <p:clrMapOvr>
+    <a:masterClrMapping/>
+  </p:clrMapOvr>
+  <p:transition spd="med">
+    <p:wipe/>
+  </p:transition>
+</p:sld>
+</file>
+
+<file path=ppt/slides/slide20.xml><?xml version="1.0" encoding="utf-8"?>
+<p:sld xmlns:a="http://schemas.openxmlformats.org/drawingml/2006/main" xmlns:r="http://schemas.openxmlformats.org/officeDocument/2006/relationships" xmlns:p="http://schemas.openxmlformats.org/presentationml/2006/main">
+  <p:cSld>
+    <p:spTree>
+      <p:nvGrpSpPr>
+        <p:cNvPr id="1" name="Shape 296"/>
+        <p:cNvGrpSpPr/>
+        <p:nvPr/>
+      </p:nvGrpSpPr>
+      <p:grpSpPr>
+        <a:xfrm>
+          <a:off x="0" y="0"/>
+          <a:ext cx="0" cy="0"/>
+          <a:chOff x="0" y="0"/>
+          <a:chExt cx="0" cy="0"/>
+        </a:xfrm>
+      </p:grpSpPr>
+      <p:sp>
+        <p:nvSpPr>
+          <p:cNvPr id="1048751" name="Google Shape;297;p21"/>
+          <p:cNvSpPr txBox="1">
+            <a:spLocks noGrp="1"/>
+          </p:cNvSpPr>
+          <p:nvPr>
+            <p:ph type="title"/>
+          </p:nvPr>
+        </p:nvSpPr>
+        <p:spPr>
+          <a:xfrm>
+            <a:off x="1764099" y="-3732"/>
+            <a:ext cx="10318425" cy="1026288"/>
+          </a:xfrm>
+          <a:prstGeom prst="rect">
+            <a:avLst/>
+          </a:prstGeom>
+          <a:noFill/>
+          <a:ln>
+            <a:noFill/>
+          </a:ln>
+        </p:spPr>
+        <p:txBody>
+          <a:bodyPr spcFirstLastPara="1" wrap="square" lIns="91425" tIns="45700" rIns="91425" bIns="45700" anchor="ctr" anchorCtr="0">
+            <a:normAutofit/>
+          </a:bodyPr>
+          <a:lstStyle/>
+          <a:p>
+            <a:pPr marL="0" lvl="0" indent="0" algn="l" rtl="0">
+              <a:lnSpc>
+                <a:spcPct val="90000"/>
+              </a:lnSpc>
+              <a:spcBef>
+                <a:spcPts val="0"/>
+              </a:spcBef>
+              <a:spcAft>
+                <a:spcPts val="0"/>
+              </a:spcAft>
+              <a:buClr>
+                <a:schemeClr val="dk1"/>
+              </a:buClr>
+              <a:buSzPct val="111111"/>
+              <a:buFont typeface="Calibri"/>
+              <a:buNone/>
+            </a:pPr>
+            <a:r>
+              <a:rPr lang="en-US" b="1" dirty="0"/>
+              <a:t>Epoch Output</a:t>
+            </a:r>
+          </a:p>
+        </p:txBody>
+      </p:sp>
+      <p:sp>
+        <p:nvSpPr>
+          <p:cNvPr id="1048752" name="Google Shape;298;p21"/>
+          <p:cNvSpPr/>
+          <p:nvPr/>
+        </p:nvSpPr>
+        <p:spPr>
+          <a:xfrm>
+            <a:off x="1" y="0"/>
+            <a:ext cx="1764099" cy="1022556"/>
+          </a:xfrm>
+          <a:custGeom>
+            <a:avLst/>
+            <a:gdLst/>
+            <a:ahLst/>
+            <a:cxnLst/>
+            <a:rect l="l" t="t" r="r" b="b"/>
+            <a:pathLst>
+              <a:path w="1764099" h="1558212" extrusionOk="0">
+                <a:moveTo>
+                  <a:pt x="0" y="0"/>
+                </a:moveTo>
+                <a:lnTo>
+                  <a:pt x="1764099" y="0"/>
+                </a:lnTo>
+                <a:lnTo>
+                  <a:pt x="1042087" y="1558212"/>
+                </a:lnTo>
+                <a:lnTo>
+                  <a:pt x="0" y="1558212"/>
+                </a:lnTo>
+                <a:close/>
+              </a:path>
+            </a:pathLst>
+          </a:custGeom>
+          <a:solidFill>
+            <a:schemeClr val="accent4"/>
+          </a:solidFill>
+          <a:ln>
+            <a:noFill/>
+          </a:ln>
+        </p:spPr>
+        <p:txBody>
+          <a:bodyPr spcFirstLastPara="1" wrap="square" lIns="91425" tIns="45700" rIns="91425" bIns="45700" anchor="ctr" anchorCtr="0">
+            <a:noAutofit/>
+          </a:bodyPr>
+          <a:lstStyle/>
+          <a:p>
+            <a:pPr marL="0" marR="0" lvl="0" indent="0" algn="ctr" rtl="0">
+              <a:lnSpc>
+                <a:spcPct val="100000"/>
+              </a:lnSpc>
+              <a:spcBef>
+                <a:spcPts val="0"/>
+              </a:spcBef>
+              <a:spcAft>
+                <a:spcPts val="0"/>
+              </a:spcAft>
+              <a:buClr>
+                <a:srgbClr val="000000"/>
+              </a:buClr>
+              <a:buSzPts val="1800"/>
+              <a:buFont typeface="Arial"/>
+              <a:buNone/>
+            </a:pPr>
+            <a:endParaRPr sz="1800" b="0" i="0" u="none" strike="noStrike" cap="none">
+              <a:solidFill>
+                <a:schemeClr val="lt1"/>
+              </a:solidFill>
+              <a:latin typeface="Calibri"/>
+              <a:ea typeface="Calibri"/>
+              <a:cs typeface="Calibri"/>
+              <a:sym typeface="Calibri"/>
+            </a:endParaRPr>
+          </a:p>
+        </p:txBody>
+      </p:sp>
+      <p:sp>
+        <p:nvSpPr>
+          <p:cNvPr id="1048753" name="Google Shape;299;p21"/>
+          <p:cNvSpPr/>
+          <p:nvPr/>
+        </p:nvSpPr>
+        <p:spPr>
+          <a:xfrm>
+            <a:off x="1" y="1190196"/>
+            <a:ext cx="12191999" cy="5667804"/>
+          </a:xfrm>
+          <a:custGeom>
+            <a:avLst/>
+            <a:gdLst/>
+            <a:ahLst/>
+            <a:cxnLst/>
+            <a:rect l="l" t="t" r="r" b="b"/>
+            <a:pathLst>
+              <a:path w="12191999" h="5166360" extrusionOk="0">
+                <a:moveTo>
+                  <a:pt x="0" y="0"/>
+                </a:moveTo>
+                <a:lnTo>
+                  <a:pt x="1822388" y="0"/>
+                </a:lnTo>
+                <a:lnTo>
+                  <a:pt x="6468290" y="0"/>
+                </a:lnTo>
+                <a:lnTo>
+                  <a:pt x="7796394" y="0"/>
+                </a:lnTo>
+                <a:lnTo>
+                  <a:pt x="8376834" y="0"/>
+                </a:lnTo>
+                <a:lnTo>
+                  <a:pt x="9704938" y="0"/>
+                </a:lnTo>
+                <a:lnTo>
+                  <a:pt x="9704938" y="2"/>
+                </a:lnTo>
+                <a:lnTo>
+                  <a:pt x="10283456" y="2"/>
+                </a:lnTo>
+                <a:lnTo>
+                  <a:pt x="10863897" y="2"/>
+                </a:lnTo>
+                <a:lnTo>
+                  <a:pt x="12191999" y="2"/>
+                </a:lnTo>
+                <a:lnTo>
+                  <a:pt x="12191999" y="5166360"/>
+                </a:lnTo>
+                <a:lnTo>
+                  <a:pt x="0" y="5166360"/>
+                </a:lnTo>
+                <a:lnTo>
+                  <a:pt x="0" y="2604436"/>
+                </a:lnTo>
+                <a:lnTo>
+                  <a:pt x="862341" y="743371"/>
+                </a:lnTo>
+                <a:lnTo>
+                  <a:pt x="0" y="743371"/>
+                </a:lnTo>
+                <a:lnTo>
+                  <a:pt x="0" y="742508"/>
+                </a:lnTo>
+                <a:lnTo>
+                  <a:pt x="92826" y="742508"/>
+                </a:lnTo>
+                <a:lnTo>
+                  <a:pt x="406486" y="742508"/>
+                </a:lnTo>
+                <a:lnTo>
+                  <a:pt x="406486" y="742507"/>
+                </a:lnTo>
+                <a:lnTo>
+                  <a:pt x="862741" y="742507"/>
+                </a:lnTo>
+                <a:lnTo>
+                  <a:pt x="1206388" y="864"/>
+                </a:lnTo>
+                <a:lnTo>
+                  <a:pt x="748500" y="864"/>
+                </a:lnTo>
+                <a:lnTo>
+                  <a:pt x="0" y="864"/>
+                </a:lnTo>
+                <a:close/>
+              </a:path>
+            </a:pathLst>
+          </a:custGeom>
+          <a:solidFill>
+            <a:srgbClr val="A6A6A6">
+              <a:alpha val="49411"/>
+            </a:srgbClr>
+          </a:solidFill>
+          <a:ln>
+            <a:noFill/>
+          </a:ln>
+        </p:spPr>
+        <p:txBody>
+          <a:bodyPr spcFirstLastPara="1" wrap="square" lIns="91425" tIns="45700" rIns="91425" bIns="45700" anchor="ctr" anchorCtr="0">
+            <a:noAutofit/>
+          </a:bodyPr>
+          <a:lstStyle/>
+          <a:p>
+            <a:pPr marL="0" marR="0" lvl="0" indent="0" algn="ctr" rtl="0">
+              <a:lnSpc>
+                <a:spcPct val="100000"/>
+              </a:lnSpc>
+              <a:spcBef>
+                <a:spcPts val="0"/>
+              </a:spcBef>
+              <a:spcAft>
+                <a:spcPts val="0"/>
+              </a:spcAft>
+              <a:buClr>
+                <a:srgbClr val="000000"/>
+              </a:buClr>
+              <a:buSzPts val="1800"/>
+              <a:buFont typeface="Arial"/>
+              <a:buNone/>
+            </a:pPr>
+            <a:r>
+              <a:rPr lang="en-IN" sz="1800" b="0" i="0" u="none" strike="noStrike" cap="none" dirty="0">
+                <a:solidFill>
+                  <a:schemeClr val="lt1"/>
+                </a:solidFill>
+                <a:latin typeface="Calibri"/>
+                <a:ea typeface="Calibri"/>
+                <a:cs typeface="Calibri"/>
+                <a:sym typeface="Calibri"/>
+              </a:rPr>
+              <a:t>s</a:t>
+            </a:r>
+            <a:endParaRPr sz="1800" b="0" i="0" u="none" strike="noStrike" cap="none" dirty="0">
+              <a:solidFill>
+                <a:schemeClr val="lt1"/>
+              </a:solidFill>
+              <a:latin typeface="Calibri"/>
+              <a:ea typeface="Calibri"/>
+              <a:cs typeface="Calibri"/>
+              <a:sym typeface="Calibri"/>
+            </a:endParaRPr>
+          </a:p>
+        </p:txBody>
+      </p:sp>
+      <p:sp>
+        <p:nvSpPr>
+          <p:cNvPr id="1048754" name="Google Shape;300;p21"/>
+          <p:cNvSpPr/>
+          <p:nvPr/>
+        </p:nvSpPr>
+        <p:spPr>
+          <a:xfrm>
+            <a:off x="0" y="1190196"/>
+            <a:ext cx="971654" cy="2096979"/>
+          </a:xfrm>
+          <a:custGeom>
+            <a:avLst/>
+            <a:gdLst/>
+            <a:ahLst/>
+            <a:cxnLst/>
+            <a:rect l="l" t="t" r="r" b="b"/>
+            <a:pathLst>
+              <a:path w="971654" h="2096979" extrusionOk="0">
+                <a:moveTo>
+                  <a:pt x="0" y="0"/>
+                </a:moveTo>
+                <a:lnTo>
+                  <a:pt x="971654" y="0"/>
+                </a:lnTo>
+                <a:lnTo>
+                  <a:pt x="0" y="2096979"/>
+                </a:lnTo>
+                <a:close/>
+              </a:path>
+            </a:pathLst>
+          </a:custGeom>
+          <a:solidFill>
+            <a:srgbClr val="404040"/>
+          </a:solidFill>
+          <a:ln>
+            <a:noFill/>
+          </a:ln>
+        </p:spPr>
+        <p:txBody>
+          <a:bodyPr spcFirstLastPara="1" wrap="square" lIns="91425" tIns="45700" rIns="91425" bIns="45700" anchor="ctr" anchorCtr="0">
+            <a:noAutofit/>
+          </a:bodyPr>
+          <a:lstStyle/>
+          <a:p>
+            <a:pPr marL="0" marR="0" lvl="0" indent="0" algn="ctr" rtl="0">
+              <a:lnSpc>
+                <a:spcPct val="100000"/>
+              </a:lnSpc>
+              <a:spcBef>
+                <a:spcPts val="0"/>
+              </a:spcBef>
+              <a:spcAft>
+                <a:spcPts val="0"/>
+              </a:spcAft>
+              <a:buClr>
+                <a:srgbClr val="000000"/>
+              </a:buClr>
+              <a:buSzPts val="1800"/>
+              <a:buFont typeface="Arial"/>
+              <a:buNone/>
+            </a:pPr>
+            <a:endParaRPr sz="1800" b="0" i="0" u="none" strike="noStrike" cap="none">
+              <a:solidFill>
+                <a:schemeClr val="lt1"/>
+              </a:solidFill>
+              <a:latin typeface="Calibri"/>
+              <a:ea typeface="Calibri"/>
+              <a:cs typeface="Calibri"/>
+              <a:sym typeface="Calibri"/>
+            </a:endParaRPr>
+          </a:p>
+        </p:txBody>
+      </p:sp>
+      <p:pic>
+        <p:nvPicPr>
+          <p:cNvPr id="4" name="Picture 3">
+            <a:extLst>
+              <a:ext uri="{FF2B5EF4-FFF2-40B4-BE49-F238E27FC236}">
+                <a16:creationId xmlns:a16="http://schemas.microsoft.com/office/drawing/2014/main" id="{B481F717-3A30-4D5D-9D2D-9498D055B611}"/>
+              </a:ext>
+            </a:extLst>
+          </p:cNvPr>
+          <p:cNvPicPr>
+            <a:picLocks noChangeAspect="1"/>
+          </p:cNvPicPr>
+          <p:nvPr/>
+        </p:nvPicPr>
+        <p:blipFill>
+          <a:blip r:embed="rId3"/>
+          <a:srcRect/>
+          <a:stretch/>
+        </p:blipFill>
+        <p:spPr>
+          <a:xfrm>
+            <a:off x="1931040" y="1546460"/>
+            <a:ext cx="8329919" cy="4955275"/>
+          </a:xfrm>
+          <a:prstGeom prst="rect">
+            <a:avLst/>
+          </a:prstGeom>
+        </p:spPr>
+      </p:pic>
+    </p:spTree>
+    <p:extLst>
+      <p:ext uri="{BB962C8B-B14F-4D97-AF65-F5344CB8AC3E}">
+        <p14:creationId xmlns:p14="http://schemas.microsoft.com/office/powerpoint/2010/main" val="3964669576"/>
+      </p:ext>
+    </p:extLst>
+  </p:cSld>
+  <p:clrMapOvr>
+    <a:masterClrMapping/>
+  </p:clrMapOvr>
+  <p:transition spd="med">
+    <p:wipe/>
+  </p:transition>
+</p:sld>
+</file>
+
+<file path=ppt/slides/slide21.xml><?xml version="1.0" encoding="utf-8"?>
 <p:sld xmlns:a="http://schemas.openxmlformats.org/drawingml/2006/main" xmlns:r="http://schemas.openxmlformats.org/officeDocument/2006/relationships" xmlns:p="http://schemas.openxmlformats.org/presentationml/2006/main">
   <p:cSld>
     <p:spTree>
@@ -21519,7 +24263,7 @@
 </p:sld>
 </file>
 
-<file path=ppt/slides/slide19.xml><?xml version="1.0" encoding="utf-8"?>
+<file path=ppt/slides/slide22.xml><?xml version="1.0" encoding="utf-8"?>
 <p:sld xmlns:a="http://schemas.openxmlformats.org/drawingml/2006/main" xmlns:r="http://schemas.openxmlformats.org/officeDocument/2006/relationships" xmlns:p="http://schemas.openxmlformats.org/presentationml/2006/main">
   <p:cSld>
     <p:spTree>
@@ -21975,12 +24719,12 @@
 </p:sld>
 </file>
 
-<file path=ppt/slides/slide2.xml><?xml version="1.0" encoding="utf-8"?>
+<file path=ppt/slides/slide23.xml><?xml version="1.0" encoding="utf-8"?>
 <p:sld xmlns:a="http://schemas.openxmlformats.org/drawingml/2006/main" xmlns:r="http://schemas.openxmlformats.org/officeDocument/2006/relationships" xmlns:p="http://schemas.openxmlformats.org/presentationml/2006/main">
   <p:cSld>
     <p:spTree>
       <p:nvGrpSpPr>
-        <p:cNvPr id="1" name="Shape 101"/>
+        <p:cNvPr id="1" name="Shape 305"/>
         <p:cNvGrpSpPr/>
         <p:nvPr/>
       </p:nvGrpSpPr>
@@ -21994,7 +24738,7 @@
       </p:grpSpPr>
       <p:sp>
         <p:nvSpPr>
-          <p:cNvPr id="1048662" name="Google Shape;102;p2"/>
+          <p:cNvPr id="1048758" name="Google Shape;306;p22"/>
           <p:cNvSpPr txBox="1">
             <a:spLocks noGrp="1"/>
           </p:cNvSpPr>
@@ -22039,15 +24783,15 @@
               <a:buNone/>
             </a:pPr>
             <a:r>
-              <a:rPr lang="en-US" b="1"/>
-              <a:t>INTRODUCTION</a:t>
+              <a:rPr lang="en-US" b="1" dirty="0"/>
+              <a:t>Limitation of Our Project</a:t>
             </a:r>
           </a:p>
         </p:txBody>
       </p:sp>
       <p:sp>
         <p:nvSpPr>
-          <p:cNvPr id="1048663" name="Google Shape;103;p2"/>
+          <p:cNvPr id="1048759" name="Google Shape;307;p22"/>
           <p:cNvSpPr/>
           <p:nvPr/>
         </p:nvSpPr>
@@ -22124,7 +24868,7 @@
       </p:sp>
       <p:sp>
         <p:nvSpPr>
-          <p:cNvPr id="1048664" name="Google Shape;104;p2"/>
+          <p:cNvPr id="1048760" name="Google Shape;308;p22"/>
           <p:cNvSpPr/>
           <p:nvPr/>
         </p:nvSpPr>
@@ -22260,7 +25004,7 @@
       </p:sp>
       <p:sp>
         <p:nvSpPr>
-          <p:cNvPr id="1048665" name="Google Shape;105;p2"/>
+          <p:cNvPr id="1048761" name="Google Shape;309;p22"/>
           <p:cNvSpPr/>
           <p:nvPr/>
         </p:nvSpPr>
@@ -22334,18 +25078,14 @@
       </p:sp>
       <p:sp>
         <p:nvSpPr>
-          <p:cNvPr id="1048666" name="Google Shape;106;p2"/>
-          <p:cNvSpPr txBox="1">
-            <a:spLocks noGrp="1"/>
-          </p:cNvSpPr>
-          <p:nvPr>
-            <p:ph type="body" idx="1"/>
-          </p:nvPr>
+          <p:cNvPr id="1048762" name="Google Shape;310;p22"/>
+          <p:cNvSpPr txBox="1"/>
+          <p:nvPr/>
         </p:nvSpPr>
         <p:spPr>
           <a:xfrm>
-            <a:off x="1219200" y="1406012"/>
-            <a:ext cx="10785987" cy="1117252"/>
+            <a:off x="1386348" y="1523999"/>
+            <a:ext cx="10481187" cy="5132439"/>
           </a:xfrm>
           <a:prstGeom prst="rect">
             <a:avLst/>
@@ -22361,9 +25101,9 @@
           </a:bodyPr>
           <a:lstStyle/>
           <a:p>
-            <a:pPr marL="228600" lvl="0" indent="-228600" algn="just" rtl="0">
-              <a:lnSpc>
-                <a:spcPct val="100000"/>
+            <a:pPr marL="228600" marR="0" lvl="0" indent="-228600" algn="just" rtl="0">
+              <a:lnSpc>
+                <a:spcPct val="150000"/>
               </a:lnSpc>
               <a:spcBef>
                 <a:spcPts val="0"/>
@@ -22374,120 +25114,12 @@
               <a:buClr>
                 <a:schemeClr val="dk1"/>
               </a:buClr>
-              <a:buSzPts val="2200"/>
-              <a:buChar char="•"/>
-            </a:pPr>
-            <a:r>
-              <a:rPr lang="en-US" sz="2000">
-                <a:latin typeface="Times New Roman"/>
-                <a:ea typeface="Times New Roman"/>
-                <a:cs typeface="Times New Roman"/>
-                <a:sym typeface="Times New Roman"/>
-              </a:rPr>
-              <a:t>There are people who are facing illnesses such as deafness or dumbness. </a:t>
-            </a:r>
-            <a:r>
-              <a:rPr lang="en-US" sz="2000" b="1">
-                <a:latin typeface="Times New Roman"/>
-                <a:ea typeface="Times New Roman"/>
-                <a:cs typeface="Times New Roman"/>
-                <a:sym typeface="Times New Roman"/>
-              </a:rPr>
-              <a:t>They face difficulty interacting with others</a:t>
-            </a:r>
-            <a:r>
-              <a:rPr lang="en-US" sz="2000">
-                <a:latin typeface="Times New Roman"/>
-                <a:ea typeface="Times New Roman"/>
-                <a:cs typeface="Times New Roman"/>
-                <a:sym typeface="Times New Roman"/>
-              </a:rPr>
-              <a:t>. Previously developed techniques are all sensors based and they didn’t give the general solution. </a:t>
-            </a:r>
-            <a:endParaRPr sz="2000">
-              <a:latin typeface="Times New Roman"/>
-              <a:ea typeface="Times New Roman"/>
-              <a:cs typeface="Times New Roman"/>
-              <a:sym typeface="Times New Roman"/>
-            </a:endParaRPr>
-          </a:p>
-        </p:txBody>
-      </p:sp>
-      <p:pic>
-        <p:nvPicPr>
-          <p:cNvPr id="2097156" name="Google Shape;107;p2"/>
-          <p:cNvPicPr preferRelativeResize="0">
-            <a:picLocks/>
-          </p:cNvPicPr>
-          <p:nvPr/>
-        </p:nvPicPr>
-        <p:blipFill rotWithShape="1">
-          <a:blip r:embed="rId3">
-            <a:alphaModFix/>
-          </a:blip>
-          <a:srcRect/>
-          <a:stretch>
-            <a:fillRect/>
-          </a:stretch>
-        </p:blipFill>
-        <p:spPr>
-          <a:xfrm>
-            <a:off x="8288326" y="2556392"/>
-            <a:ext cx="3636883" cy="3655616"/>
-          </a:xfrm>
-          <a:prstGeom prst="rect">
-            <a:avLst/>
-          </a:prstGeom>
-          <a:noFill/>
-          <a:ln>
-            <a:noFill/>
-          </a:ln>
-        </p:spPr>
-      </p:pic>
-      <p:sp>
-        <p:nvSpPr>
-          <p:cNvPr id="1048667" name="Google Shape;108;p2"/>
-          <p:cNvSpPr txBox="1"/>
-          <p:nvPr/>
-        </p:nvSpPr>
-        <p:spPr>
-          <a:xfrm>
-            <a:off x="1219200" y="2438399"/>
-            <a:ext cx="6870741" cy="4168877"/>
-          </a:xfrm>
-          <a:prstGeom prst="rect">
-            <a:avLst/>
-          </a:prstGeom>
-          <a:noFill/>
-          <a:ln>
-            <a:noFill/>
-          </a:ln>
-        </p:spPr>
-        <p:txBody>
-          <a:bodyPr spcFirstLastPara="1" wrap="square" lIns="91425" tIns="45700" rIns="91425" bIns="45700" anchor="t" anchorCtr="0">
-            <a:normAutofit fontScale="87955"/>
-          </a:bodyPr>
-          <a:lstStyle/>
-          <a:p>
-            <a:pPr marL="228600" marR="0" lvl="0" indent="-228600" algn="just" rtl="0">
-              <a:lnSpc>
-                <a:spcPct val="110000"/>
-              </a:lnSpc>
-              <a:spcBef>
-                <a:spcPts val="1000"/>
-              </a:spcBef>
-              <a:spcAft>
-                <a:spcPts val="0"/>
-              </a:spcAft>
-              <a:buClr>
-                <a:schemeClr val="dk1"/>
-              </a:buClr>
-              <a:buSzPct val="108108"/>
+              <a:buSzPts val="2400"/>
               <a:buFont typeface="Arial"/>
               <a:buChar char="•"/>
             </a:pPr>
             <a:r>
-              <a:rPr lang="en-US" sz="2200" b="0" i="0" u="none" strike="noStrike" cap="none">
+              <a:rPr lang="en-IN" sz="2000" b="0" i="0" u="none" strike="noStrike" cap="none" dirty="0">
                 <a:solidFill>
                   <a:schemeClr val="dk1"/>
                 </a:solidFill>
@@ -22496,146 +25128,110 @@
                 <a:cs typeface="Times New Roman"/>
                 <a:sym typeface="Times New Roman"/>
               </a:rPr>
-              <a:t>This presentation explains a new technique of </a:t>
+              <a:t>To create gesture, proper setup is needed with proper lighting, best webcam or camera</a:t>
             </a:r>
+          </a:p>
+          <a:p>
+            <a:pPr marL="228600" marR="0" lvl="0" indent="-228600" algn="just" rtl="0">
+              <a:lnSpc>
+                <a:spcPct val="150000"/>
+              </a:lnSpc>
+              <a:spcBef>
+                <a:spcPts val="0"/>
+              </a:spcBef>
+              <a:spcAft>
+                <a:spcPts val="0"/>
+              </a:spcAft>
+              <a:buClr>
+                <a:schemeClr val="dk1"/>
+              </a:buClr>
+              <a:buSzPts val="2400"/>
+              <a:buFont typeface="Arial"/>
+              <a:buChar char="•"/>
+            </a:pPr>
             <a:r>
-              <a:rPr lang="en-US" sz="2200" b="1" i="0" u="none" strike="noStrike" cap="none">
+              <a:rPr lang="en-IN" sz="2000" dirty="0">
                 <a:solidFill>
                   <a:schemeClr val="dk1"/>
                 </a:solidFill>
                 <a:latin typeface="Times New Roman"/>
-                <a:ea typeface="Times New Roman"/>
+                <a:ea typeface="Calibri"/>
                 <a:cs typeface="Times New Roman"/>
                 <a:sym typeface="Times New Roman"/>
               </a:rPr>
-              <a:t>virtual talking without sensors</a:t>
+              <a:t>Huge dataset – Sign gesture of multi person is needed to be done so to increase accuracy.</a:t>
             </a:r>
+          </a:p>
+          <a:p>
+            <a:pPr marL="228600" marR="0" lvl="0" indent="-228600" algn="just" rtl="0">
+              <a:lnSpc>
+                <a:spcPct val="150000"/>
+              </a:lnSpc>
+              <a:spcBef>
+                <a:spcPts val="0"/>
+              </a:spcBef>
+              <a:spcAft>
+                <a:spcPts val="0"/>
+              </a:spcAft>
+              <a:buClr>
+                <a:schemeClr val="dk1"/>
+              </a:buClr>
+              <a:buSzPts val="2400"/>
+              <a:buFont typeface="Arial"/>
+              <a:buChar char="•"/>
+            </a:pPr>
             <a:r>
-              <a:rPr lang="en-US" sz="2200" b="0" i="0" u="none" strike="noStrike" cap="none">
+              <a:rPr lang="en-IN" sz="2000" dirty="0">
                 <a:solidFill>
                   <a:schemeClr val="dk1"/>
                 </a:solidFill>
                 <a:latin typeface="Times New Roman"/>
-                <a:ea typeface="Times New Roman"/>
+                <a:ea typeface="Calibri"/>
                 <a:cs typeface="Times New Roman"/>
                 <a:sym typeface="Times New Roman"/>
               </a:rPr>
-              <a:t>. Convolutional Neural Network has been used to train the System. Web Camera is used to take the image of different gestures and that will be used as input to the </a:t>
+              <a:t>High end CPU is needed to perform complex computation.</a:t>
             </a:r>
+          </a:p>
+          <a:p>
+            <a:pPr marL="228600" marR="0" lvl="0" indent="-228600" algn="just" rtl="0">
+              <a:lnSpc>
+                <a:spcPct val="150000"/>
+              </a:lnSpc>
+              <a:spcBef>
+                <a:spcPts val="0"/>
+              </a:spcBef>
+              <a:spcAft>
+                <a:spcPts val="0"/>
+              </a:spcAft>
+              <a:buClr>
+                <a:schemeClr val="dk1"/>
+              </a:buClr>
+              <a:buSzPts val="2400"/>
+              <a:buFont typeface="Arial"/>
+              <a:buChar char="•"/>
+            </a:pPr>
             <a:r>
-              <a:rPr lang="en-US" sz="2200" b="1" i="0" u="none" strike="noStrike" cap="none">
+              <a:rPr lang="en-IN" sz="2000" dirty="0">
                 <a:solidFill>
                   <a:schemeClr val="dk1"/>
                 </a:solidFill>
                 <a:latin typeface="Times New Roman"/>
-                <a:ea typeface="Times New Roman"/>
+                <a:ea typeface="Calibri"/>
                 <a:cs typeface="Times New Roman"/>
                 <a:sym typeface="Times New Roman"/>
               </a:rPr>
-              <a:t>MATLAB</a:t>
-            </a:r>
-            <a:r>
-              <a:rPr lang="en-US" sz="2200" b="0" i="0" u="none" strike="noStrike" cap="none">
-                <a:solidFill>
-                  <a:schemeClr val="dk1"/>
-                </a:solidFill>
-                <a:latin typeface="Times New Roman"/>
-                <a:ea typeface="Times New Roman"/>
-                <a:cs typeface="Times New Roman"/>
-                <a:sym typeface="Times New Roman"/>
-              </a:rPr>
-              <a:t>. </a:t>
-            </a:r>
-          </a:p>
-          <a:p>
-            <a:pPr marL="228600" marR="0" lvl="0" indent="-228600" algn="just" rtl="0">
-              <a:lnSpc>
-                <a:spcPct val="110000"/>
-              </a:lnSpc>
-              <a:spcBef>
-                <a:spcPts val="1000"/>
-              </a:spcBef>
-              <a:spcAft>
-                <a:spcPts val="0"/>
-              </a:spcAft>
-              <a:buClr>
-                <a:schemeClr val="dk1"/>
-              </a:buClr>
-              <a:buSzPct val="108108"/>
-              <a:buFont typeface="Arial"/>
-              <a:buChar char="•"/>
-            </a:pPr>
-            <a:r>
-              <a:rPr lang="en-US" sz="2200" b="0" i="0" u="none" strike="noStrike" cap="none">
-                <a:solidFill>
-                  <a:schemeClr val="dk1"/>
-                </a:solidFill>
-                <a:latin typeface="Times New Roman"/>
-                <a:ea typeface="Times New Roman"/>
-                <a:cs typeface="Times New Roman"/>
-                <a:sym typeface="Times New Roman"/>
-              </a:rPr>
-              <a:t>The </a:t>
-            </a:r>
-            <a:r>
-              <a:rPr lang="en-US" sz="2200" b="1" i="0" u="none" strike="noStrike" cap="none">
-                <a:solidFill>
-                  <a:schemeClr val="dk1"/>
-                </a:solidFill>
-                <a:latin typeface="Times New Roman"/>
-                <a:ea typeface="Times New Roman"/>
-                <a:cs typeface="Times New Roman"/>
-                <a:sym typeface="Times New Roman"/>
-              </a:rPr>
-              <a:t>software will recognize the image </a:t>
-            </a:r>
-            <a:r>
-              <a:rPr lang="en-US" sz="2200" b="0" i="0" u="none" strike="noStrike" cap="none">
-                <a:solidFill>
-                  <a:schemeClr val="dk1"/>
-                </a:solidFill>
-                <a:latin typeface="Times New Roman"/>
-                <a:ea typeface="Times New Roman"/>
-                <a:cs typeface="Times New Roman"/>
-                <a:sym typeface="Times New Roman"/>
-              </a:rPr>
-              <a:t>and identify the cores sign language and convert them to English language and give voice output using a voice replay kit.</a:t>
-            </a:r>
-          </a:p>
-          <a:p>
-            <a:pPr marL="228600" marR="0" lvl="0" indent="-228600" algn="just" rtl="0">
-              <a:lnSpc>
-                <a:spcPct val="110000"/>
-              </a:lnSpc>
-              <a:spcBef>
-                <a:spcPts val="1000"/>
-              </a:spcBef>
-              <a:spcAft>
-                <a:spcPts val="0"/>
-              </a:spcAft>
-              <a:buClr>
-                <a:schemeClr val="dk1"/>
-              </a:buClr>
-              <a:buSzPct val="108108"/>
-              <a:buFont typeface="Arial"/>
-              <a:buChar char="•"/>
-            </a:pPr>
-            <a:r>
-              <a:rPr lang="en-US" sz="2200" b="0" i="0" u="none" strike="noStrike" cap="none">
-                <a:solidFill>
-                  <a:schemeClr val="dk1"/>
-                </a:solidFill>
-                <a:latin typeface="Times New Roman"/>
-                <a:ea typeface="Times New Roman"/>
-                <a:cs typeface="Times New Roman"/>
-                <a:sym typeface="Times New Roman"/>
-              </a:rPr>
-              <a:t>Such as two-way communications between the dumb and normal people would be capable by converting the sign language to text and voice for various uses such as on video conference.</a:t>
+              <a:t>Program lag due to lack to RAM allocation and GPU.</a:t>
             </a:r>
           </a:p>
         </p:txBody>
       </p:sp>
     </p:spTree>
+    <p:extLst>
+      <p:ext uri="{BB962C8B-B14F-4D97-AF65-F5344CB8AC3E}">
+        <p14:creationId xmlns:p14="http://schemas.microsoft.com/office/powerpoint/2010/main" val="2347854230"/>
+      </p:ext>
+    </p:extLst>
   </p:cSld>
   <p:clrMapOvr>
     <a:masterClrMapping/>
@@ -22646,12 +25242,12 @@
 </p:sld>
 </file>
 
-<file path=ppt/slides/slide20.xml><?xml version="1.0" encoding="utf-8"?>
+<file path=ppt/slides/slide24.xml><?xml version="1.0" encoding="utf-8"?>
 <p:sld xmlns:a="http://schemas.openxmlformats.org/drawingml/2006/main" xmlns:r="http://schemas.openxmlformats.org/officeDocument/2006/relationships" xmlns:p="http://schemas.openxmlformats.org/presentationml/2006/main">
   <p:cSld>
     <p:spTree>
       <p:nvGrpSpPr>
-        <p:cNvPr id="1" name="Shape 296"/>
+        <p:cNvPr id="1" name="Shape 305"/>
         <p:cNvGrpSpPr/>
         <p:nvPr/>
       </p:nvGrpSpPr>
@@ -22665,7 +25261,7 @@
       </p:grpSpPr>
       <p:sp>
         <p:nvSpPr>
-          <p:cNvPr id="1048751" name="Google Shape;297;p21"/>
+          <p:cNvPr id="1048758" name="Google Shape;306;p22"/>
           <p:cNvSpPr txBox="1">
             <a:spLocks noGrp="1"/>
           </p:cNvSpPr>
@@ -22688,7 +25284,7 @@
         </p:spPr>
         <p:txBody>
           <a:bodyPr spcFirstLastPara="1" wrap="square" lIns="91425" tIns="45700" rIns="91425" bIns="45700" anchor="ctr" anchorCtr="0">
-            <a:normAutofit fontScale="90000"/>
+            <a:normAutofit/>
           </a:bodyPr>
           <a:lstStyle/>
           <a:p>
@@ -22705,20 +25301,20 @@
               <a:buClr>
                 <a:schemeClr val="dk1"/>
               </a:buClr>
-              <a:buSzPct val="111111"/>
+              <a:buSzPts val="4400"/>
               <a:buFont typeface="Calibri"/>
               <a:buNone/>
             </a:pPr>
             <a:r>
-              <a:rPr lang="en-US" b="1"/>
-              <a:t>Minimum Hardware &amp; Software Requirement</a:t>
+              <a:rPr lang="en-US" b="1" dirty="0"/>
+              <a:t>Future Work Scope</a:t>
             </a:r>
           </a:p>
         </p:txBody>
       </p:sp>
       <p:sp>
         <p:nvSpPr>
-          <p:cNvPr id="1048752" name="Google Shape;298;p21"/>
+          <p:cNvPr id="1048759" name="Google Shape;307;p22"/>
           <p:cNvSpPr/>
           <p:nvPr/>
         </p:nvSpPr>
@@ -22795,7 +25391,7 @@
       </p:sp>
       <p:sp>
         <p:nvSpPr>
-          <p:cNvPr id="1048753" name="Google Shape;299;p21"/>
+          <p:cNvPr id="1048760" name="Google Shape;308;p22"/>
           <p:cNvSpPr/>
           <p:nvPr/>
         </p:nvSpPr>
@@ -22931,7 +25527,7 @@
       </p:sp>
       <p:sp>
         <p:nvSpPr>
-          <p:cNvPr id="1048754" name="Google Shape;300;p21"/>
+          <p:cNvPr id="1048761" name="Google Shape;309;p22"/>
           <p:cNvSpPr/>
           <p:nvPr/>
         </p:nvSpPr>
@@ -23005,18 +25601,14 @@
       </p:sp>
       <p:sp>
         <p:nvSpPr>
-          <p:cNvPr id="1048755" name="Google Shape;301;p21"/>
-          <p:cNvSpPr txBox="1">
-            <a:spLocks noGrp="1"/>
-          </p:cNvSpPr>
-          <p:nvPr>
-            <p:ph type="body" idx="1"/>
-          </p:nvPr>
+          <p:cNvPr id="1048762" name="Google Shape;310;p22"/>
+          <p:cNvSpPr txBox="1"/>
+          <p:nvPr/>
         </p:nvSpPr>
         <p:spPr>
           <a:xfrm>
-            <a:off x="1309234" y="1317523"/>
-            <a:ext cx="10636960" cy="5329083"/>
+            <a:off x="1386348" y="1523999"/>
+            <a:ext cx="10481187" cy="5132439"/>
           </a:xfrm>
           <a:prstGeom prst="rect">
             <a:avLst/>
@@ -23028,11 +25620,11 @@
         </p:spPr>
         <p:txBody>
           <a:bodyPr spcFirstLastPara="1" wrap="square" lIns="91425" tIns="45700" rIns="91425" bIns="45700" anchor="t" anchorCtr="0">
-            <a:noAutofit/>
+            <a:normAutofit/>
           </a:bodyPr>
           <a:lstStyle/>
           <a:p>
-            <a:pPr marL="0" lvl="0" indent="0" algn="l" rtl="0">
+            <a:pPr marL="228600" marR="0" lvl="0" indent="-228600" algn="just" rtl="0">
               <a:lnSpc>
                 <a:spcPct val="150000"/>
               </a:lnSpc>
@@ -23045,27 +25637,30 @@
               <a:buClr>
                 <a:schemeClr val="dk1"/>
               </a:buClr>
-              <a:buSzPts val="2000"/>
-              <a:buNone/>
+              <a:buSzPts val="2400"/>
+              <a:buFont typeface="Arial"/>
+              <a:buChar char="•"/>
             </a:pPr>
             <a:r>
-              <a:rPr lang="en-US" sz="1800" b="1">
+              <a:rPr lang="en-IN" sz="2000" b="0" i="0" u="none" strike="noStrike" cap="none" dirty="0">
+                <a:solidFill>
+                  <a:schemeClr val="dk1"/>
+                </a:solidFill>
                 <a:latin typeface="Times New Roman"/>
                 <a:ea typeface="Times New Roman"/>
                 <a:cs typeface="Times New Roman"/>
                 <a:sym typeface="Times New Roman"/>
               </a:rPr>
-              <a:t>Software Requirements:</a:t>
+              <a:t>To make sentence as per multi gesture</a:t>
             </a:r>
-            <a:endParaRPr sz="2400" b="1"/>
           </a:p>
           <a:p>
-            <a:pPr marL="0" lvl="0" indent="0" algn="l" rtl="0">
+            <a:pPr marL="228600" marR="0" lvl="0" indent="-228600" algn="just" rtl="0">
               <a:lnSpc>
                 <a:spcPct val="150000"/>
               </a:lnSpc>
               <a:spcBef>
-                <a:spcPts val="1000"/>
+                <a:spcPts val="0"/>
               </a:spcBef>
               <a:spcAft>
                 <a:spcPts val="0"/>
@@ -23073,36 +25668,42 @@
               <a:buClr>
                 <a:schemeClr val="dk1"/>
               </a:buClr>
-              <a:buSzPts val="2000"/>
-              <a:buNone/>
+              <a:buSzPts val="2400"/>
+              <a:buFont typeface="Arial"/>
+              <a:buChar char="•"/>
             </a:pPr>
             <a:r>
-              <a:rPr lang="en-US" sz="1800">
+              <a:rPr lang="en-IN" sz="2000" b="0" i="0" u="none" strike="noStrike" cap="none" dirty="0">
+                <a:solidFill>
+                  <a:schemeClr val="dk1"/>
+                </a:solidFill>
                 <a:latin typeface="Times New Roman"/>
-                <a:ea typeface="Times New Roman"/>
+                <a:ea typeface="Calibri"/>
                 <a:cs typeface="Times New Roman"/>
                 <a:sym typeface="Times New Roman"/>
               </a:rPr>
-              <a:t>	Operating system 	:   </a:t>
+              <a:t>Take video input as dataset, such as to identify </a:t>
             </a:r>
             <a:r>
-              <a:rPr lang="en-US" sz="1800" b="1">
+              <a:rPr lang="en-IN" sz="2000" dirty="0">
+                <a:solidFill>
+                  <a:schemeClr val="dk1"/>
+                </a:solidFill>
                 <a:latin typeface="Times New Roman"/>
-                <a:ea typeface="Times New Roman"/>
+                <a:ea typeface="Calibri"/>
                 <a:cs typeface="Times New Roman"/>
                 <a:sym typeface="Times New Roman"/>
               </a:rPr>
-              <a:t>64 bit Windows 10</a:t>
+              <a:t>hand shake</a:t>
             </a:r>
-            <a:endParaRPr sz="2400" b="1"/>
           </a:p>
           <a:p>
-            <a:pPr marL="0" lvl="0" indent="0" algn="l" rtl="0">
+            <a:pPr marL="228600" marR="0" lvl="0" indent="-228600" algn="just" rtl="0">
               <a:lnSpc>
                 <a:spcPct val="150000"/>
               </a:lnSpc>
               <a:spcBef>
-                <a:spcPts val="1000"/>
+                <a:spcPts val="0"/>
               </a:spcBef>
               <a:spcAft>
                 <a:spcPts val="0"/>
@@ -23110,321 +25711,84 @@
               <a:buClr>
                 <a:schemeClr val="dk1"/>
               </a:buClr>
-              <a:buSzPts val="2000"/>
-              <a:buNone/>
+              <a:buSzPts val="2400"/>
+              <a:buFont typeface="Arial"/>
+              <a:buChar char="•"/>
             </a:pPr>
             <a:r>
-              <a:rPr lang="en-US" sz="1800">
+              <a:rPr lang="en-IN" sz="2000" dirty="0">
+                <a:solidFill>
+                  <a:schemeClr val="dk1"/>
+                </a:solidFill>
                 <a:latin typeface="Times New Roman"/>
-                <a:ea typeface="Times New Roman"/>
+                <a:ea typeface="Calibri"/>
                 <a:cs typeface="Times New Roman"/>
                 <a:sym typeface="Times New Roman"/>
               </a:rPr>
-              <a:t>	Coding Language	:   </a:t>
+              <a:t>To integrate emotional sentiments,</a:t>
             </a:r>
+          </a:p>
+          <a:p>
+            <a:pPr marR="0" lvl="0" algn="just" rtl="0">
+              <a:lnSpc>
+                <a:spcPct val="150000"/>
+              </a:lnSpc>
+              <a:spcBef>
+                <a:spcPts val="0"/>
+              </a:spcBef>
+              <a:spcAft>
+                <a:spcPts val="0"/>
+              </a:spcAft>
+              <a:buClr>
+                <a:schemeClr val="dk1"/>
+              </a:buClr>
+              <a:buSzPts val="2400"/>
+            </a:pPr>
             <a:r>
-              <a:rPr lang="en-US" sz="1800" b="1">
+              <a:rPr lang="en-IN" sz="2000" dirty="0">
+                <a:solidFill>
+                  <a:schemeClr val="dk1"/>
+                </a:solidFill>
                 <a:latin typeface="Times New Roman"/>
-                <a:ea typeface="Times New Roman"/>
+                <a:ea typeface="Calibri"/>
                 <a:cs typeface="Times New Roman"/>
                 <a:sym typeface="Times New Roman"/>
               </a:rPr>
-              <a:t>Python</a:t>
+              <a:t>	</a:t>
             </a:r>
-            <a:endParaRPr sz="2400" b="1"/>
-          </a:p>
-          <a:p>
-            <a:pPr marL="0" lvl="0" indent="0" algn="l" rtl="0">
-              <a:lnSpc>
-                <a:spcPct val="150000"/>
-              </a:lnSpc>
-              <a:spcBef>
-                <a:spcPts val="1000"/>
-              </a:spcBef>
-              <a:spcAft>
-                <a:spcPts val="0"/>
-              </a:spcAft>
-              <a:buClr>
-                <a:schemeClr val="dk1"/>
-              </a:buClr>
-              <a:buSzPts val="2000"/>
-              <a:buNone/>
-            </a:pPr>
             <a:r>
-              <a:rPr lang="en-US" sz="1800">
+              <a:rPr lang="en-IN" sz="2000" dirty="0" err="1">
+                <a:solidFill>
+                  <a:schemeClr val="dk1"/>
+                </a:solidFill>
                 <a:latin typeface="Times New Roman"/>
-                <a:ea typeface="Times New Roman"/>
+                <a:ea typeface="Calibri"/>
                 <a:cs typeface="Times New Roman"/>
                 <a:sym typeface="Times New Roman"/>
               </a:rPr>
-              <a:t>	Design constraints	:   </a:t>
+              <a:t>Eg.</a:t>
             </a:r>
             <a:r>
-              <a:rPr lang="en-US" sz="1800" b="1">
+              <a:rPr lang="en-IN" sz="2000" dirty="0">
+                <a:solidFill>
+                  <a:schemeClr val="dk1"/>
+                </a:solidFill>
                 <a:latin typeface="Times New Roman"/>
-                <a:ea typeface="Times New Roman"/>
+                <a:ea typeface="Calibri"/>
                 <a:cs typeface="Times New Roman"/>
                 <a:sym typeface="Times New Roman"/>
               </a:rPr>
-              <a:t>Spyder</a:t>
+              <a:t> “Hello” and “Bye” have same signature so we have  to identify what conversation was going on.</a:t>
             </a:r>
-            <a:endParaRPr sz="1800" b="1">
-              <a:latin typeface="Times New Roman"/>
-              <a:ea typeface="Times New Roman"/>
-              <a:cs typeface="Times New Roman"/>
-              <a:sym typeface="Times New Roman"/>
-            </a:endParaRPr>
-          </a:p>
-          <a:p>
-            <a:pPr marL="0" lvl="0" indent="0" algn="l" rtl="0">
-              <a:lnSpc>
-                <a:spcPct val="150000"/>
-              </a:lnSpc>
-              <a:spcBef>
-                <a:spcPts val="1000"/>
-              </a:spcBef>
-              <a:spcAft>
-                <a:spcPts val="0"/>
-              </a:spcAft>
-              <a:buClr>
-                <a:schemeClr val="dk1"/>
-              </a:buClr>
-              <a:buSzPts val="2000"/>
-              <a:buNone/>
-            </a:pPr>
-            <a:r>
-              <a:rPr lang="en-US" sz="1800" b="1">
-                <a:latin typeface="Times New Roman"/>
-                <a:ea typeface="Times New Roman"/>
-                <a:cs typeface="Times New Roman"/>
-                <a:sym typeface="Times New Roman"/>
-              </a:rPr>
-              <a:t>Hardware Requirements:</a:t>
-            </a:r>
-            <a:endParaRPr sz="2400" b="1"/>
-          </a:p>
-          <a:p>
-            <a:pPr marL="0" lvl="0" indent="0" algn="l" rtl="0">
-              <a:lnSpc>
-                <a:spcPct val="150000"/>
-              </a:lnSpc>
-              <a:spcBef>
-                <a:spcPts val="1000"/>
-              </a:spcBef>
-              <a:spcAft>
-                <a:spcPts val="0"/>
-              </a:spcAft>
-              <a:buClr>
-                <a:schemeClr val="dk1"/>
-              </a:buClr>
-              <a:buSzPts val="2000"/>
-              <a:buNone/>
-            </a:pPr>
-            <a:r>
-              <a:rPr lang="en-US" sz="1800">
-                <a:latin typeface="Times New Roman"/>
-                <a:ea typeface="Times New Roman"/>
-                <a:cs typeface="Times New Roman"/>
-                <a:sym typeface="Times New Roman"/>
-              </a:rPr>
-              <a:t>	System Processors	:  </a:t>
-            </a:r>
-            <a:r>
-              <a:rPr lang="en-US" sz="1800" b="1">
-                <a:latin typeface="Times New Roman"/>
-                <a:ea typeface="Times New Roman"/>
-                <a:cs typeface="Times New Roman"/>
-                <a:sym typeface="Times New Roman"/>
-              </a:rPr>
-              <a:t>Intel i5</a:t>
-            </a:r>
-            <a:endParaRPr sz="1800" b="1">
-              <a:latin typeface="Times New Roman"/>
-              <a:ea typeface="Times New Roman"/>
-              <a:cs typeface="Times New Roman"/>
-              <a:sym typeface="Times New Roman"/>
-            </a:endParaRPr>
-          </a:p>
-          <a:p>
-            <a:pPr marL="0" lvl="0" indent="0" algn="l" rtl="0">
-              <a:lnSpc>
-                <a:spcPct val="150000"/>
-              </a:lnSpc>
-              <a:spcBef>
-                <a:spcPts val="1000"/>
-              </a:spcBef>
-              <a:spcAft>
-                <a:spcPts val="0"/>
-              </a:spcAft>
-              <a:buClr>
-                <a:schemeClr val="dk1"/>
-              </a:buClr>
-              <a:buSzPts val="2000"/>
-              <a:buNone/>
-            </a:pPr>
-            <a:r>
-              <a:rPr lang="en-US" sz="1800">
-                <a:latin typeface="Times New Roman"/>
-                <a:ea typeface="Times New Roman"/>
-                <a:cs typeface="Times New Roman"/>
-                <a:sym typeface="Times New Roman"/>
-              </a:rPr>
-              <a:t>	Speed		:  </a:t>
-            </a:r>
-            <a:r>
-              <a:rPr lang="en-US" sz="1800" b="1">
-                <a:latin typeface="Times New Roman"/>
-                <a:ea typeface="Times New Roman"/>
-                <a:cs typeface="Times New Roman"/>
-                <a:sym typeface="Times New Roman"/>
-              </a:rPr>
-              <a:t>2.4 GHz</a:t>
-            </a:r>
-            <a:endParaRPr sz="1800" b="1">
-              <a:latin typeface="Times New Roman"/>
-              <a:ea typeface="Times New Roman"/>
-              <a:cs typeface="Times New Roman"/>
-              <a:sym typeface="Times New Roman"/>
-            </a:endParaRPr>
-          </a:p>
-          <a:p>
-            <a:pPr marL="0" lvl="0" indent="0" algn="l" rtl="0">
-              <a:lnSpc>
-                <a:spcPct val="150000"/>
-              </a:lnSpc>
-              <a:spcBef>
-                <a:spcPts val="1000"/>
-              </a:spcBef>
-              <a:spcAft>
-                <a:spcPts val="0"/>
-              </a:spcAft>
-              <a:buClr>
-                <a:schemeClr val="dk1"/>
-              </a:buClr>
-              <a:buSzPts val="2000"/>
-              <a:buNone/>
-            </a:pPr>
-            <a:r>
-              <a:rPr lang="en-US" sz="1800">
-                <a:latin typeface="Times New Roman"/>
-                <a:ea typeface="Times New Roman"/>
-                <a:cs typeface="Times New Roman"/>
-                <a:sym typeface="Times New Roman"/>
-              </a:rPr>
-              <a:t>	Hard Disk        	:  </a:t>
-            </a:r>
-            <a:r>
-              <a:rPr lang="en-US" sz="1800" b="1">
-                <a:latin typeface="Times New Roman"/>
-                <a:ea typeface="Times New Roman"/>
-                <a:cs typeface="Times New Roman"/>
-                <a:sym typeface="Times New Roman"/>
-              </a:rPr>
-              <a:t>150 GB</a:t>
-            </a:r>
-            <a:endParaRPr sz="2400" b="1"/>
-          </a:p>
-          <a:p>
-            <a:pPr marL="0" lvl="0" indent="0" algn="l" rtl="0">
-              <a:lnSpc>
-                <a:spcPct val="150000"/>
-              </a:lnSpc>
-              <a:spcBef>
-                <a:spcPts val="1000"/>
-              </a:spcBef>
-              <a:spcAft>
-                <a:spcPts val="0"/>
-              </a:spcAft>
-              <a:buClr>
-                <a:schemeClr val="dk1"/>
-              </a:buClr>
-              <a:buSzPts val="2000"/>
-              <a:buNone/>
-            </a:pPr>
-            <a:r>
-              <a:rPr lang="en-US" sz="1800">
-                <a:latin typeface="Times New Roman"/>
-                <a:ea typeface="Times New Roman"/>
-                <a:cs typeface="Times New Roman"/>
-                <a:sym typeface="Times New Roman"/>
-              </a:rPr>
-              <a:t>	RAM 		:  </a:t>
-            </a:r>
-            <a:r>
-              <a:rPr lang="en-US" sz="1800" b="1">
-                <a:latin typeface="Times New Roman"/>
-                <a:ea typeface="Times New Roman"/>
-                <a:cs typeface="Times New Roman"/>
-                <a:sym typeface="Times New Roman"/>
-              </a:rPr>
-              <a:t>8 GB</a:t>
-            </a:r>
-            <a:endParaRPr sz="1800" b="1">
-              <a:latin typeface="Times New Roman"/>
-              <a:ea typeface="Times New Roman"/>
-              <a:cs typeface="Times New Roman"/>
-              <a:sym typeface="Times New Roman"/>
-            </a:endParaRPr>
-          </a:p>
-          <a:p>
-            <a:pPr marL="0" lvl="0" indent="0" algn="l" rtl="0">
-              <a:lnSpc>
-                <a:spcPct val="150000"/>
-              </a:lnSpc>
-              <a:spcBef>
-                <a:spcPts val="1000"/>
-              </a:spcBef>
-              <a:spcAft>
-                <a:spcPts val="0"/>
-              </a:spcAft>
-              <a:buClr>
-                <a:schemeClr val="dk1"/>
-              </a:buClr>
-              <a:buSzPts val="2000"/>
-              <a:buNone/>
-            </a:pPr>
-            <a:r>
-              <a:rPr lang="en-US" sz="1800">
-                <a:latin typeface="Times New Roman"/>
-                <a:ea typeface="Times New Roman"/>
-                <a:cs typeface="Times New Roman"/>
-                <a:sym typeface="Times New Roman"/>
-              </a:rPr>
-              <a:t>	Graphic Card	:  </a:t>
-            </a:r>
-            <a:r>
-              <a:rPr lang="en-US" sz="1800" b="1">
-                <a:latin typeface="Times New Roman"/>
-                <a:ea typeface="Times New Roman"/>
-                <a:cs typeface="Times New Roman"/>
-                <a:sym typeface="Times New Roman"/>
-              </a:rPr>
-              <a:t>2 GB</a:t>
-            </a:r>
-            <a:endParaRPr sz="2400" b="1"/>
-          </a:p>
-          <a:p>
-            <a:pPr marL="228600" lvl="0" indent="-158750" algn="l" rtl="0">
-              <a:lnSpc>
-                <a:spcPct val="150000"/>
-              </a:lnSpc>
-              <a:spcBef>
-                <a:spcPts val="1000"/>
-              </a:spcBef>
-              <a:spcAft>
-                <a:spcPts val="0"/>
-              </a:spcAft>
-              <a:buClr>
-                <a:schemeClr val="dk1"/>
-              </a:buClr>
-              <a:buSzPts val="1100"/>
-              <a:buNone/>
-            </a:pPr>
-            <a:endParaRPr sz="1050"/>
           </a:p>
         </p:txBody>
       </p:sp>
     </p:spTree>
+    <p:extLst>
+      <p:ext uri="{BB962C8B-B14F-4D97-AF65-F5344CB8AC3E}">
+        <p14:creationId xmlns:p14="http://schemas.microsoft.com/office/powerpoint/2010/main" val="3543672964"/>
+      </p:ext>
+    </p:extLst>
   </p:cSld>
   <p:clrMapOvr>
     <a:masterClrMapping/>
@@ -23435,7 +25799,7 @@
 </p:sld>
 </file>
 
-<file path=ppt/slides/slide21.xml><?xml version="1.0" encoding="utf-8"?>
+<file path=ppt/slides/slide25.xml><?xml version="1.0" encoding="utf-8"?>
 <p:sld xmlns:a="http://schemas.openxmlformats.org/drawingml/2006/main" xmlns:r="http://schemas.openxmlformats.org/officeDocument/2006/relationships" xmlns:p="http://schemas.openxmlformats.org/presentationml/2006/main">
   <p:cSld>
     <p:spTree>
@@ -24109,7 +26473,7 @@
 </p:sld>
 </file>
 
-<file path=ppt/slides/slide22.xml><?xml version="1.0" encoding="utf-8"?>
+<file path=ppt/slides/slide26.xml><?xml version="1.0" encoding="utf-8"?>
 <p:sld xmlns:a="http://schemas.openxmlformats.org/drawingml/2006/main" xmlns:r="http://schemas.openxmlformats.org/officeDocument/2006/relationships" xmlns:p="http://schemas.openxmlformats.org/presentationml/2006/main">
   <p:cSld>
     <p:spTree>
